--- a/public/videos/repositories/miseoshi-app/miseoshi-app-tech-preview.pptx
+++ b/public/videos/repositories/miseoshi-app/miseoshi-app-tech-preview.pptx
@@ -134,7 +134,7 @@
           <p:cNvPr id="2" name="タイトル 1">
             <a:extLst>
               <a:ext uri="{FF2B5EF4-FFF2-40B4-BE49-F238E27FC236}">
-                <a16:creationId xmlns:a16="http://schemas.microsoft.com/office/drawing/2014/main" id="{D4D67C19-FED2-6022-8318-2173CD7935C7}"/>
+                <a16:creationId xmlns:a16="http://schemas.microsoft.com/office/drawing/2014/main" id="{5279AC82-09B8-506F-3343-3B6671410075}"/>
               </a:ext>
             </a:extLst>
           </p:cNvPr>
@@ -171,7 +171,7 @@
           <p:cNvPr id="3" name="字幕 2">
             <a:extLst>
               <a:ext uri="{FF2B5EF4-FFF2-40B4-BE49-F238E27FC236}">
-                <a16:creationId xmlns:a16="http://schemas.microsoft.com/office/drawing/2014/main" id="{3A2B55E5-254D-F405-6038-FFAD7AABDF2F}"/>
+                <a16:creationId xmlns:a16="http://schemas.microsoft.com/office/drawing/2014/main" id="{8AB60ADA-80E6-C634-1DB1-C6D221683544}"/>
               </a:ext>
             </a:extLst>
           </p:cNvPr>
@@ -241,7 +241,7 @@
           <p:cNvPr id="4" name="日付プレースホルダー 3">
             <a:extLst>
               <a:ext uri="{FF2B5EF4-FFF2-40B4-BE49-F238E27FC236}">
-                <a16:creationId xmlns:a16="http://schemas.microsoft.com/office/drawing/2014/main" id="{1BD37C77-80AA-2783-6818-288E9D851BBD}"/>
+                <a16:creationId xmlns:a16="http://schemas.microsoft.com/office/drawing/2014/main" id="{03688510-AA52-8C11-9CC9-730AC480D66C}"/>
               </a:ext>
             </a:extLst>
           </p:cNvPr>
@@ -257,7 +257,7 @@
           <a:bodyPr/>
           <a:lstStyle/>
           <a:p>
-            <a:fld id="{384B06E5-7D3D-4E91-9485-314C13BE2CD6}" type="datetimeFigureOut">
+            <a:fld id="{613F318F-0286-42A3-B4C5-AF963E0EF8C7}" type="datetimeFigureOut">
               <a:rPr kumimoji="1" lang="ja-JP" altLang="en-US" smtClean="0"/>
               <a:t>2026/7/30</a:t>
             </a:fld>
@@ -270,7 +270,7 @@
           <p:cNvPr id="5" name="フッター プレースホルダー 4">
             <a:extLst>
               <a:ext uri="{FF2B5EF4-FFF2-40B4-BE49-F238E27FC236}">
-                <a16:creationId xmlns:a16="http://schemas.microsoft.com/office/drawing/2014/main" id="{60B60443-B6B2-A73D-DD51-D5EC658058E3}"/>
+                <a16:creationId xmlns:a16="http://schemas.microsoft.com/office/drawing/2014/main" id="{81452211-6431-F4B0-A32C-3F0B20CC475A}"/>
               </a:ext>
             </a:extLst>
           </p:cNvPr>
@@ -295,7 +295,7 @@
           <p:cNvPr id="6" name="スライド番号プレースホルダー 5">
             <a:extLst>
               <a:ext uri="{FF2B5EF4-FFF2-40B4-BE49-F238E27FC236}">
-                <a16:creationId xmlns:a16="http://schemas.microsoft.com/office/drawing/2014/main" id="{F8839BA2-6C4E-4C76-2258-161DE5D54E22}"/>
+                <a16:creationId xmlns:a16="http://schemas.microsoft.com/office/drawing/2014/main" id="{AFCE458A-70F3-763C-DB02-C8F1C85ACC0A}"/>
               </a:ext>
             </a:extLst>
           </p:cNvPr>
@@ -311,7 +311,7 @@
           <a:bodyPr/>
           <a:lstStyle/>
           <a:p>
-            <a:fld id="{F345249A-52B0-4A96-8A09-0420A53F285B}" type="slidenum">
+            <a:fld id="{CF235A59-D3CA-4A18-84D9-4CB90E6C5DC8}" type="slidenum">
               <a:rPr kumimoji="1" lang="ja-JP" altLang="en-US" smtClean="0"/>
               <a:t>‹#›</a:t>
             </a:fld>
@@ -322,7 +322,7 @@
     </p:spTree>
     <p:extLst>
       <p:ext uri="{BB962C8B-B14F-4D97-AF65-F5344CB8AC3E}">
-        <p14:creationId xmlns:p14="http://schemas.microsoft.com/office/powerpoint/2010/main" val="2486044610"/>
+        <p14:creationId xmlns:p14="http://schemas.microsoft.com/office/powerpoint/2010/main" val="3819897067"/>
       </p:ext>
     </p:extLst>
   </p:cSld>
@@ -354,7 +354,7 @@
           <p:cNvPr id="2" name="タイトル 1">
             <a:extLst>
               <a:ext uri="{FF2B5EF4-FFF2-40B4-BE49-F238E27FC236}">
-                <a16:creationId xmlns:a16="http://schemas.microsoft.com/office/drawing/2014/main" id="{45AFE601-9D64-2C96-4C95-6239DA009873}"/>
+                <a16:creationId xmlns:a16="http://schemas.microsoft.com/office/drawing/2014/main" id="{30C2F019-8C0E-12F8-CD0B-06CEA390DE75}"/>
               </a:ext>
             </a:extLst>
           </p:cNvPr>
@@ -382,7 +382,7 @@
           <p:cNvPr id="3" name="縦書きテキスト プレースホルダー 2">
             <a:extLst>
               <a:ext uri="{FF2B5EF4-FFF2-40B4-BE49-F238E27FC236}">
-                <a16:creationId xmlns:a16="http://schemas.microsoft.com/office/drawing/2014/main" id="{66EFE1FA-0756-67B6-B11F-BE0701B1A685}"/>
+                <a16:creationId xmlns:a16="http://schemas.microsoft.com/office/drawing/2014/main" id="{A991CA6B-795E-3407-6FCA-42151FCE442A}"/>
               </a:ext>
             </a:extLst>
           </p:cNvPr>
@@ -471,7 +471,7 @@
           <p:cNvPr id="4" name="日付プレースホルダー 3">
             <a:extLst>
               <a:ext uri="{FF2B5EF4-FFF2-40B4-BE49-F238E27FC236}">
-                <a16:creationId xmlns:a16="http://schemas.microsoft.com/office/drawing/2014/main" id="{E489E8CF-EE04-4051-D337-248537FF38DB}"/>
+                <a16:creationId xmlns:a16="http://schemas.microsoft.com/office/drawing/2014/main" id="{0D740541-766E-878D-0592-692F9776D20E}"/>
               </a:ext>
             </a:extLst>
           </p:cNvPr>
@@ -487,7 +487,7 @@
           <a:bodyPr/>
           <a:lstStyle/>
           <a:p>
-            <a:fld id="{384B06E5-7D3D-4E91-9485-314C13BE2CD6}" type="datetimeFigureOut">
+            <a:fld id="{613F318F-0286-42A3-B4C5-AF963E0EF8C7}" type="datetimeFigureOut">
               <a:rPr kumimoji="1" lang="ja-JP" altLang="en-US" smtClean="0"/>
               <a:t>2026/7/30</a:t>
             </a:fld>
@@ -500,7 +500,7 @@
           <p:cNvPr id="5" name="フッター プレースホルダー 4">
             <a:extLst>
               <a:ext uri="{FF2B5EF4-FFF2-40B4-BE49-F238E27FC236}">
-                <a16:creationId xmlns:a16="http://schemas.microsoft.com/office/drawing/2014/main" id="{FA1F92E5-6A0C-C603-F248-29E015DCBACD}"/>
+                <a16:creationId xmlns:a16="http://schemas.microsoft.com/office/drawing/2014/main" id="{489569B1-F3B8-766C-BED6-34CB6F29EA6D}"/>
               </a:ext>
             </a:extLst>
           </p:cNvPr>
@@ -525,7 +525,7 @@
           <p:cNvPr id="6" name="スライド番号プレースホルダー 5">
             <a:extLst>
               <a:ext uri="{FF2B5EF4-FFF2-40B4-BE49-F238E27FC236}">
-                <a16:creationId xmlns:a16="http://schemas.microsoft.com/office/drawing/2014/main" id="{168B02E6-F152-518E-8F93-B49CA2DF29C3}"/>
+                <a16:creationId xmlns:a16="http://schemas.microsoft.com/office/drawing/2014/main" id="{80824FDF-3D27-CBBD-C011-AD3691C5A5F8}"/>
               </a:ext>
             </a:extLst>
           </p:cNvPr>
@@ -541,7 +541,7 @@
           <a:bodyPr/>
           <a:lstStyle/>
           <a:p>
-            <a:fld id="{F345249A-52B0-4A96-8A09-0420A53F285B}" type="slidenum">
+            <a:fld id="{CF235A59-D3CA-4A18-84D9-4CB90E6C5DC8}" type="slidenum">
               <a:rPr kumimoji="1" lang="ja-JP" altLang="en-US" smtClean="0"/>
               <a:t>‹#›</a:t>
             </a:fld>
@@ -552,7 +552,7 @@
     </p:spTree>
     <p:extLst>
       <p:ext uri="{BB962C8B-B14F-4D97-AF65-F5344CB8AC3E}">
-        <p14:creationId xmlns:p14="http://schemas.microsoft.com/office/powerpoint/2010/main" val="1762521384"/>
+        <p14:creationId xmlns:p14="http://schemas.microsoft.com/office/powerpoint/2010/main" val="539925351"/>
       </p:ext>
     </p:extLst>
   </p:cSld>
@@ -584,7 +584,7 @@
           <p:cNvPr id="2" name="縦書きタイトル 1">
             <a:extLst>
               <a:ext uri="{FF2B5EF4-FFF2-40B4-BE49-F238E27FC236}">
-                <a16:creationId xmlns:a16="http://schemas.microsoft.com/office/drawing/2014/main" id="{D345C7CB-E60B-7B9C-72DC-F6E815B2BFDB}"/>
+                <a16:creationId xmlns:a16="http://schemas.microsoft.com/office/drawing/2014/main" id="{7B2B8DDA-4BED-43D6-AAF8-540565248944}"/>
               </a:ext>
             </a:extLst>
           </p:cNvPr>
@@ -617,7 +617,7 @@
           <p:cNvPr id="3" name="縦書きテキスト プレースホルダー 2">
             <a:extLst>
               <a:ext uri="{FF2B5EF4-FFF2-40B4-BE49-F238E27FC236}">
-                <a16:creationId xmlns:a16="http://schemas.microsoft.com/office/drawing/2014/main" id="{796AA584-1EF2-A432-7615-C295DC0337E6}"/>
+                <a16:creationId xmlns:a16="http://schemas.microsoft.com/office/drawing/2014/main" id="{EE98039E-4870-7137-4F16-3C0FA21B10B0}"/>
               </a:ext>
             </a:extLst>
           </p:cNvPr>
@@ -711,7 +711,7 @@
           <p:cNvPr id="4" name="日付プレースホルダー 3">
             <a:extLst>
               <a:ext uri="{FF2B5EF4-FFF2-40B4-BE49-F238E27FC236}">
-                <a16:creationId xmlns:a16="http://schemas.microsoft.com/office/drawing/2014/main" id="{97AEE978-0A68-8887-F1A4-4F6D747368C8}"/>
+                <a16:creationId xmlns:a16="http://schemas.microsoft.com/office/drawing/2014/main" id="{758B0F92-646F-2FA1-1F68-DF6C71DD12EB}"/>
               </a:ext>
             </a:extLst>
           </p:cNvPr>
@@ -727,7 +727,7 @@
           <a:bodyPr/>
           <a:lstStyle/>
           <a:p>
-            <a:fld id="{384B06E5-7D3D-4E91-9485-314C13BE2CD6}" type="datetimeFigureOut">
+            <a:fld id="{613F318F-0286-42A3-B4C5-AF963E0EF8C7}" type="datetimeFigureOut">
               <a:rPr kumimoji="1" lang="ja-JP" altLang="en-US" smtClean="0"/>
               <a:t>2026/7/30</a:t>
             </a:fld>
@@ -740,7 +740,7 @@
           <p:cNvPr id="5" name="フッター プレースホルダー 4">
             <a:extLst>
               <a:ext uri="{FF2B5EF4-FFF2-40B4-BE49-F238E27FC236}">
-                <a16:creationId xmlns:a16="http://schemas.microsoft.com/office/drawing/2014/main" id="{C6F2C40D-CEA9-70DB-6DF6-BDEE60C91FD8}"/>
+                <a16:creationId xmlns:a16="http://schemas.microsoft.com/office/drawing/2014/main" id="{FABCDDE8-AE4E-6509-D662-AAED9BA47107}"/>
               </a:ext>
             </a:extLst>
           </p:cNvPr>
@@ -765,7 +765,7 @@
           <p:cNvPr id="6" name="スライド番号プレースホルダー 5">
             <a:extLst>
               <a:ext uri="{FF2B5EF4-FFF2-40B4-BE49-F238E27FC236}">
-                <a16:creationId xmlns:a16="http://schemas.microsoft.com/office/drawing/2014/main" id="{645B9E91-808B-C9DA-6214-3BD3ABD0C5B4}"/>
+                <a16:creationId xmlns:a16="http://schemas.microsoft.com/office/drawing/2014/main" id="{EE02B111-2BA4-A979-9E41-9B12D9F599BA}"/>
               </a:ext>
             </a:extLst>
           </p:cNvPr>
@@ -781,7 +781,7 @@
           <a:bodyPr/>
           <a:lstStyle/>
           <a:p>
-            <a:fld id="{F345249A-52B0-4A96-8A09-0420A53F285B}" type="slidenum">
+            <a:fld id="{CF235A59-D3CA-4A18-84D9-4CB90E6C5DC8}" type="slidenum">
               <a:rPr kumimoji="1" lang="ja-JP" altLang="en-US" smtClean="0"/>
               <a:t>‹#›</a:t>
             </a:fld>
@@ -792,7 +792,7 @@
     </p:spTree>
     <p:extLst>
       <p:ext uri="{BB962C8B-B14F-4D97-AF65-F5344CB8AC3E}">
-        <p14:creationId xmlns:p14="http://schemas.microsoft.com/office/powerpoint/2010/main" val="707796455"/>
+        <p14:creationId xmlns:p14="http://schemas.microsoft.com/office/powerpoint/2010/main" val="146814037"/>
       </p:ext>
     </p:extLst>
   </p:cSld>
@@ -824,7 +824,7 @@
           <p:cNvPr id="2" name="タイトル 1">
             <a:extLst>
               <a:ext uri="{FF2B5EF4-FFF2-40B4-BE49-F238E27FC236}">
-                <a16:creationId xmlns:a16="http://schemas.microsoft.com/office/drawing/2014/main" id="{51ABBC2D-6684-F1E3-809F-2B99ECFB44C8}"/>
+                <a16:creationId xmlns:a16="http://schemas.microsoft.com/office/drawing/2014/main" id="{4BEC8C9A-78FF-2FCD-3BB8-B67CB1C9B0D5}"/>
               </a:ext>
             </a:extLst>
           </p:cNvPr>
@@ -852,7 +852,7 @@
           <p:cNvPr id="3" name="コンテンツ プレースホルダー 2">
             <a:extLst>
               <a:ext uri="{FF2B5EF4-FFF2-40B4-BE49-F238E27FC236}">
-                <a16:creationId xmlns:a16="http://schemas.microsoft.com/office/drawing/2014/main" id="{083E10A7-750E-8F0A-1440-5A475EEC3375}"/>
+                <a16:creationId xmlns:a16="http://schemas.microsoft.com/office/drawing/2014/main" id="{A04E0F7F-E2EF-D117-D38A-F7C661D95C21}"/>
               </a:ext>
             </a:extLst>
           </p:cNvPr>
@@ -941,7 +941,7 @@
           <p:cNvPr id="4" name="日付プレースホルダー 3">
             <a:extLst>
               <a:ext uri="{FF2B5EF4-FFF2-40B4-BE49-F238E27FC236}">
-                <a16:creationId xmlns:a16="http://schemas.microsoft.com/office/drawing/2014/main" id="{A7F1477B-6547-ACC2-462C-691686E8F263}"/>
+                <a16:creationId xmlns:a16="http://schemas.microsoft.com/office/drawing/2014/main" id="{FF23CC02-0E19-C2CB-4875-0A05A0664E5D}"/>
               </a:ext>
             </a:extLst>
           </p:cNvPr>
@@ -957,7 +957,7 @@
           <a:bodyPr/>
           <a:lstStyle/>
           <a:p>
-            <a:fld id="{384B06E5-7D3D-4E91-9485-314C13BE2CD6}" type="datetimeFigureOut">
+            <a:fld id="{613F318F-0286-42A3-B4C5-AF963E0EF8C7}" type="datetimeFigureOut">
               <a:rPr kumimoji="1" lang="ja-JP" altLang="en-US" smtClean="0"/>
               <a:t>2026/7/30</a:t>
             </a:fld>
@@ -970,7 +970,7 @@
           <p:cNvPr id="5" name="フッター プレースホルダー 4">
             <a:extLst>
               <a:ext uri="{FF2B5EF4-FFF2-40B4-BE49-F238E27FC236}">
-                <a16:creationId xmlns:a16="http://schemas.microsoft.com/office/drawing/2014/main" id="{4CAF44AF-0ABC-E140-126A-95ED7944A46A}"/>
+                <a16:creationId xmlns:a16="http://schemas.microsoft.com/office/drawing/2014/main" id="{18884685-0D7D-E985-766D-595DB76BE6C1}"/>
               </a:ext>
             </a:extLst>
           </p:cNvPr>
@@ -995,7 +995,7 @@
           <p:cNvPr id="6" name="スライド番号プレースホルダー 5">
             <a:extLst>
               <a:ext uri="{FF2B5EF4-FFF2-40B4-BE49-F238E27FC236}">
-                <a16:creationId xmlns:a16="http://schemas.microsoft.com/office/drawing/2014/main" id="{DC04B0D9-0EA5-665F-AD97-FD29D3B1CF89}"/>
+                <a16:creationId xmlns:a16="http://schemas.microsoft.com/office/drawing/2014/main" id="{E338F898-3EA9-B449-EBF5-6CCE3ADC81C5}"/>
               </a:ext>
             </a:extLst>
           </p:cNvPr>
@@ -1011,7 +1011,7 @@
           <a:bodyPr/>
           <a:lstStyle/>
           <a:p>
-            <a:fld id="{F345249A-52B0-4A96-8A09-0420A53F285B}" type="slidenum">
+            <a:fld id="{CF235A59-D3CA-4A18-84D9-4CB90E6C5DC8}" type="slidenum">
               <a:rPr kumimoji="1" lang="ja-JP" altLang="en-US" smtClean="0"/>
               <a:t>‹#›</a:t>
             </a:fld>
@@ -1022,7 +1022,7 @@
     </p:spTree>
     <p:extLst>
       <p:ext uri="{BB962C8B-B14F-4D97-AF65-F5344CB8AC3E}">
-        <p14:creationId xmlns:p14="http://schemas.microsoft.com/office/powerpoint/2010/main" val="896217801"/>
+        <p14:creationId xmlns:p14="http://schemas.microsoft.com/office/powerpoint/2010/main" val="430382836"/>
       </p:ext>
     </p:extLst>
   </p:cSld>
@@ -1054,7 +1054,7 @@
           <p:cNvPr id="2" name="タイトル 1">
             <a:extLst>
               <a:ext uri="{FF2B5EF4-FFF2-40B4-BE49-F238E27FC236}">
-                <a16:creationId xmlns:a16="http://schemas.microsoft.com/office/drawing/2014/main" id="{83BB360D-38FD-CE27-A974-CC8DBDFD10EC}"/>
+                <a16:creationId xmlns:a16="http://schemas.microsoft.com/office/drawing/2014/main" id="{3F6FCD91-369D-6E2E-0925-F9EBC11622DB}"/>
               </a:ext>
             </a:extLst>
           </p:cNvPr>
@@ -1091,7 +1091,7 @@
           <p:cNvPr id="3" name="テキスト プレースホルダー 2">
             <a:extLst>
               <a:ext uri="{FF2B5EF4-FFF2-40B4-BE49-F238E27FC236}">
-                <a16:creationId xmlns:a16="http://schemas.microsoft.com/office/drawing/2014/main" id="{D522F22A-FDF5-1246-654F-347204C2CB45}"/>
+                <a16:creationId xmlns:a16="http://schemas.microsoft.com/office/drawing/2014/main" id="{DD64FD38-3064-DE6E-FE28-0737D5E987A1}"/>
               </a:ext>
             </a:extLst>
           </p:cNvPr>
@@ -1216,7 +1216,7 @@
           <p:cNvPr id="4" name="日付プレースホルダー 3">
             <a:extLst>
               <a:ext uri="{FF2B5EF4-FFF2-40B4-BE49-F238E27FC236}">
-                <a16:creationId xmlns:a16="http://schemas.microsoft.com/office/drawing/2014/main" id="{3DD362AC-5AD6-8EF6-CD07-AF548022EBD4}"/>
+                <a16:creationId xmlns:a16="http://schemas.microsoft.com/office/drawing/2014/main" id="{53300AF7-09FD-2BFF-F5D6-2FC090918D66}"/>
               </a:ext>
             </a:extLst>
           </p:cNvPr>
@@ -1232,7 +1232,7 @@
           <a:bodyPr/>
           <a:lstStyle/>
           <a:p>
-            <a:fld id="{384B06E5-7D3D-4E91-9485-314C13BE2CD6}" type="datetimeFigureOut">
+            <a:fld id="{613F318F-0286-42A3-B4C5-AF963E0EF8C7}" type="datetimeFigureOut">
               <a:rPr kumimoji="1" lang="ja-JP" altLang="en-US" smtClean="0"/>
               <a:t>2026/7/30</a:t>
             </a:fld>
@@ -1245,7 +1245,7 @@
           <p:cNvPr id="5" name="フッター プレースホルダー 4">
             <a:extLst>
               <a:ext uri="{FF2B5EF4-FFF2-40B4-BE49-F238E27FC236}">
-                <a16:creationId xmlns:a16="http://schemas.microsoft.com/office/drawing/2014/main" id="{E9050C34-8C7A-0A93-68A2-DF4800F88E3B}"/>
+                <a16:creationId xmlns:a16="http://schemas.microsoft.com/office/drawing/2014/main" id="{292C972C-E0A2-9E9D-DF53-595EE9DC6281}"/>
               </a:ext>
             </a:extLst>
           </p:cNvPr>
@@ -1270,7 +1270,7 @@
           <p:cNvPr id="6" name="スライド番号プレースホルダー 5">
             <a:extLst>
               <a:ext uri="{FF2B5EF4-FFF2-40B4-BE49-F238E27FC236}">
-                <a16:creationId xmlns:a16="http://schemas.microsoft.com/office/drawing/2014/main" id="{899E4C54-11A5-55F0-9E83-4199A0A742A6}"/>
+                <a16:creationId xmlns:a16="http://schemas.microsoft.com/office/drawing/2014/main" id="{DB2BCA97-F894-2332-EAC2-085AC2B98687}"/>
               </a:ext>
             </a:extLst>
           </p:cNvPr>
@@ -1286,7 +1286,7 @@
           <a:bodyPr/>
           <a:lstStyle/>
           <a:p>
-            <a:fld id="{F345249A-52B0-4A96-8A09-0420A53F285B}" type="slidenum">
+            <a:fld id="{CF235A59-D3CA-4A18-84D9-4CB90E6C5DC8}" type="slidenum">
               <a:rPr kumimoji="1" lang="ja-JP" altLang="en-US" smtClean="0"/>
               <a:t>‹#›</a:t>
             </a:fld>
@@ -1297,7 +1297,7 @@
     </p:spTree>
     <p:extLst>
       <p:ext uri="{BB962C8B-B14F-4D97-AF65-F5344CB8AC3E}">
-        <p14:creationId xmlns:p14="http://schemas.microsoft.com/office/powerpoint/2010/main" val="3143899996"/>
+        <p14:creationId xmlns:p14="http://schemas.microsoft.com/office/powerpoint/2010/main" val="465846348"/>
       </p:ext>
     </p:extLst>
   </p:cSld>
@@ -1329,7 +1329,7 @@
           <p:cNvPr id="2" name="タイトル 1">
             <a:extLst>
               <a:ext uri="{FF2B5EF4-FFF2-40B4-BE49-F238E27FC236}">
-                <a16:creationId xmlns:a16="http://schemas.microsoft.com/office/drawing/2014/main" id="{0FAAC727-A4C3-1D9D-EDB8-D20DD0100BF6}"/>
+                <a16:creationId xmlns:a16="http://schemas.microsoft.com/office/drawing/2014/main" id="{512CBCDE-D8C3-0D3E-0FA4-69D3CDCAC94C}"/>
               </a:ext>
             </a:extLst>
           </p:cNvPr>
@@ -1357,7 +1357,7 @@
           <p:cNvPr id="3" name="コンテンツ プレースホルダー 2">
             <a:extLst>
               <a:ext uri="{FF2B5EF4-FFF2-40B4-BE49-F238E27FC236}">
-                <a16:creationId xmlns:a16="http://schemas.microsoft.com/office/drawing/2014/main" id="{2799812E-A6E7-AFA3-7662-214D658DCB6A}"/>
+                <a16:creationId xmlns:a16="http://schemas.microsoft.com/office/drawing/2014/main" id="{EDA3406F-E979-8E3E-27BA-1B64F8D1B932}"/>
               </a:ext>
             </a:extLst>
           </p:cNvPr>
@@ -1451,7 +1451,7 @@
           <p:cNvPr id="4" name="コンテンツ プレースホルダー 3">
             <a:extLst>
               <a:ext uri="{FF2B5EF4-FFF2-40B4-BE49-F238E27FC236}">
-                <a16:creationId xmlns:a16="http://schemas.microsoft.com/office/drawing/2014/main" id="{C7BA85CB-E33D-E96B-9158-4D8867F60B10}"/>
+                <a16:creationId xmlns:a16="http://schemas.microsoft.com/office/drawing/2014/main" id="{66416741-4F37-5DE8-2206-31B70A8BD5B3}"/>
               </a:ext>
             </a:extLst>
           </p:cNvPr>
@@ -1545,7 +1545,7 @@
           <p:cNvPr id="5" name="日付プレースホルダー 4">
             <a:extLst>
               <a:ext uri="{FF2B5EF4-FFF2-40B4-BE49-F238E27FC236}">
-                <a16:creationId xmlns:a16="http://schemas.microsoft.com/office/drawing/2014/main" id="{DA6E1542-C147-C1F2-17C7-7FA8399E5DD4}"/>
+                <a16:creationId xmlns:a16="http://schemas.microsoft.com/office/drawing/2014/main" id="{1FE4A958-5FB1-1B24-CE2B-9DE9395635A9}"/>
               </a:ext>
             </a:extLst>
           </p:cNvPr>
@@ -1561,7 +1561,7 @@
           <a:bodyPr/>
           <a:lstStyle/>
           <a:p>
-            <a:fld id="{384B06E5-7D3D-4E91-9485-314C13BE2CD6}" type="datetimeFigureOut">
+            <a:fld id="{613F318F-0286-42A3-B4C5-AF963E0EF8C7}" type="datetimeFigureOut">
               <a:rPr kumimoji="1" lang="ja-JP" altLang="en-US" smtClean="0"/>
               <a:t>2026/7/30</a:t>
             </a:fld>
@@ -1574,7 +1574,7 @@
           <p:cNvPr id="6" name="フッター プレースホルダー 5">
             <a:extLst>
               <a:ext uri="{FF2B5EF4-FFF2-40B4-BE49-F238E27FC236}">
-                <a16:creationId xmlns:a16="http://schemas.microsoft.com/office/drawing/2014/main" id="{0394A62F-5389-21FE-BB02-E5E84DEB7616}"/>
+                <a16:creationId xmlns:a16="http://schemas.microsoft.com/office/drawing/2014/main" id="{5A9938ED-705E-8571-7594-E05700101A54}"/>
               </a:ext>
             </a:extLst>
           </p:cNvPr>
@@ -1599,7 +1599,7 @@
           <p:cNvPr id="7" name="スライド番号プレースホルダー 6">
             <a:extLst>
               <a:ext uri="{FF2B5EF4-FFF2-40B4-BE49-F238E27FC236}">
-                <a16:creationId xmlns:a16="http://schemas.microsoft.com/office/drawing/2014/main" id="{C06EED20-66AE-6DD9-69C3-301271F38588}"/>
+                <a16:creationId xmlns:a16="http://schemas.microsoft.com/office/drawing/2014/main" id="{23459169-91B5-7683-6178-66D7E4633B7C}"/>
               </a:ext>
             </a:extLst>
           </p:cNvPr>
@@ -1615,7 +1615,7 @@
           <a:bodyPr/>
           <a:lstStyle/>
           <a:p>
-            <a:fld id="{F345249A-52B0-4A96-8A09-0420A53F285B}" type="slidenum">
+            <a:fld id="{CF235A59-D3CA-4A18-84D9-4CB90E6C5DC8}" type="slidenum">
               <a:rPr kumimoji="1" lang="ja-JP" altLang="en-US" smtClean="0"/>
               <a:t>‹#›</a:t>
             </a:fld>
@@ -1626,7 +1626,7 @@
     </p:spTree>
     <p:extLst>
       <p:ext uri="{BB962C8B-B14F-4D97-AF65-F5344CB8AC3E}">
-        <p14:creationId xmlns:p14="http://schemas.microsoft.com/office/powerpoint/2010/main" val="2953218006"/>
+        <p14:creationId xmlns:p14="http://schemas.microsoft.com/office/powerpoint/2010/main" val="1465662302"/>
       </p:ext>
     </p:extLst>
   </p:cSld>
@@ -1658,7 +1658,7 @@
           <p:cNvPr id="2" name="タイトル 1">
             <a:extLst>
               <a:ext uri="{FF2B5EF4-FFF2-40B4-BE49-F238E27FC236}">
-                <a16:creationId xmlns:a16="http://schemas.microsoft.com/office/drawing/2014/main" id="{945CC191-CE5A-499B-7294-CE0AE9161EAF}"/>
+                <a16:creationId xmlns:a16="http://schemas.microsoft.com/office/drawing/2014/main" id="{EC18BA31-B84B-D34A-B33F-CAD688E35561}"/>
               </a:ext>
             </a:extLst>
           </p:cNvPr>
@@ -1691,7 +1691,7 @@
           <p:cNvPr id="3" name="テキスト プレースホルダー 2">
             <a:extLst>
               <a:ext uri="{FF2B5EF4-FFF2-40B4-BE49-F238E27FC236}">
-                <a16:creationId xmlns:a16="http://schemas.microsoft.com/office/drawing/2014/main" id="{C3170334-0785-97FA-1382-9E96220E4073}"/>
+                <a16:creationId xmlns:a16="http://schemas.microsoft.com/office/drawing/2014/main" id="{C146DD6C-BAC0-DF30-2E81-9494C7A8A5AC}"/>
               </a:ext>
             </a:extLst>
           </p:cNvPr>
@@ -1762,7 +1762,7 @@
           <p:cNvPr id="4" name="コンテンツ プレースホルダー 3">
             <a:extLst>
               <a:ext uri="{FF2B5EF4-FFF2-40B4-BE49-F238E27FC236}">
-                <a16:creationId xmlns:a16="http://schemas.microsoft.com/office/drawing/2014/main" id="{B083B2C3-D4D4-03CC-5582-5E9E24D09DF0}"/>
+                <a16:creationId xmlns:a16="http://schemas.microsoft.com/office/drawing/2014/main" id="{EBEF67DC-5F2E-5F57-0EFC-2499BA355FED}"/>
               </a:ext>
             </a:extLst>
           </p:cNvPr>
@@ -1856,7 +1856,7 @@
           <p:cNvPr id="5" name="テキスト プレースホルダー 4">
             <a:extLst>
               <a:ext uri="{FF2B5EF4-FFF2-40B4-BE49-F238E27FC236}">
-                <a16:creationId xmlns:a16="http://schemas.microsoft.com/office/drawing/2014/main" id="{5AD44B97-86D2-ADB8-CD9B-88CF71DA0BB1}"/>
+                <a16:creationId xmlns:a16="http://schemas.microsoft.com/office/drawing/2014/main" id="{D315AF4D-D850-5DE0-DCF2-121D88E654C2}"/>
               </a:ext>
             </a:extLst>
           </p:cNvPr>
@@ -1927,7 +1927,7 @@
           <p:cNvPr id="6" name="コンテンツ プレースホルダー 5">
             <a:extLst>
               <a:ext uri="{FF2B5EF4-FFF2-40B4-BE49-F238E27FC236}">
-                <a16:creationId xmlns:a16="http://schemas.microsoft.com/office/drawing/2014/main" id="{90F8A319-2CA0-8E29-CFA6-EB028DCF5BBD}"/>
+                <a16:creationId xmlns:a16="http://schemas.microsoft.com/office/drawing/2014/main" id="{6A51C1A1-0FCC-758F-ACAF-025408700AD6}"/>
               </a:ext>
             </a:extLst>
           </p:cNvPr>
@@ -2021,7 +2021,7 @@
           <p:cNvPr id="7" name="日付プレースホルダー 6">
             <a:extLst>
               <a:ext uri="{FF2B5EF4-FFF2-40B4-BE49-F238E27FC236}">
-                <a16:creationId xmlns:a16="http://schemas.microsoft.com/office/drawing/2014/main" id="{BAB282CA-CD13-ED7C-12E8-6B7B734342FA}"/>
+                <a16:creationId xmlns:a16="http://schemas.microsoft.com/office/drawing/2014/main" id="{F684348C-DF28-EE85-6D8A-9D7E27032D7F}"/>
               </a:ext>
             </a:extLst>
           </p:cNvPr>
@@ -2037,7 +2037,7 @@
           <a:bodyPr/>
           <a:lstStyle/>
           <a:p>
-            <a:fld id="{384B06E5-7D3D-4E91-9485-314C13BE2CD6}" type="datetimeFigureOut">
+            <a:fld id="{613F318F-0286-42A3-B4C5-AF963E0EF8C7}" type="datetimeFigureOut">
               <a:rPr kumimoji="1" lang="ja-JP" altLang="en-US" smtClean="0"/>
               <a:t>2026/7/30</a:t>
             </a:fld>
@@ -2050,7 +2050,7 @@
           <p:cNvPr id="8" name="フッター プレースホルダー 7">
             <a:extLst>
               <a:ext uri="{FF2B5EF4-FFF2-40B4-BE49-F238E27FC236}">
-                <a16:creationId xmlns:a16="http://schemas.microsoft.com/office/drawing/2014/main" id="{17393137-20B2-5988-815C-EA1816E04A5B}"/>
+                <a16:creationId xmlns:a16="http://schemas.microsoft.com/office/drawing/2014/main" id="{B717FB9B-CAB7-3D3B-3F0B-70E4BD5D4320}"/>
               </a:ext>
             </a:extLst>
           </p:cNvPr>
@@ -2075,7 +2075,7 @@
           <p:cNvPr id="9" name="スライド番号プレースホルダー 8">
             <a:extLst>
               <a:ext uri="{FF2B5EF4-FFF2-40B4-BE49-F238E27FC236}">
-                <a16:creationId xmlns:a16="http://schemas.microsoft.com/office/drawing/2014/main" id="{38C945F4-DDF4-1BBD-4F33-96CA9ECA3494}"/>
+                <a16:creationId xmlns:a16="http://schemas.microsoft.com/office/drawing/2014/main" id="{2C9D2092-737B-6220-4EA0-49DA3C61D86B}"/>
               </a:ext>
             </a:extLst>
           </p:cNvPr>
@@ -2091,7 +2091,7 @@
           <a:bodyPr/>
           <a:lstStyle/>
           <a:p>
-            <a:fld id="{F345249A-52B0-4A96-8A09-0420A53F285B}" type="slidenum">
+            <a:fld id="{CF235A59-D3CA-4A18-84D9-4CB90E6C5DC8}" type="slidenum">
               <a:rPr kumimoji="1" lang="ja-JP" altLang="en-US" smtClean="0"/>
               <a:t>‹#›</a:t>
             </a:fld>
@@ -2102,7 +2102,7 @@
     </p:spTree>
     <p:extLst>
       <p:ext uri="{BB962C8B-B14F-4D97-AF65-F5344CB8AC3E}">
-        <p14:creationId xmlns:p14="http://schemas.microsoft.com/office/powerpoint/2010/main" val="4078832713"/>
+        <p14:creationId xmlns:p14="http://schemas.microsoft.com/office/powerpoint/2010/main" val="2517738729"/>
       </p:ext>
     </p:extLst>
   </p:cSld>
@@ -2134,7 +2134,7 @@
           <p:cNvPr id="2" name="タイトル 1">
             <a:extLst>
               <a:ext uri="{FF2B5EF4-FFF2-40B4-BE49-F238E27FC236}">
-                <a16:creationId xmlns:a16="http://schemas.microsoft.com/office/drawing/2014/main" id="{23FB16A7-FAD3-D7F4-F4AD-825C55FC802D}"/>
+                <a16:creationId xmlns:a16="http://schemas.microsoft.com/office/drawing/2014/main" id="{64B44536-4BE8-24B1-3BA7-10B8F5DC2C55}"/>
               </a:ext>
             </a:extLst>
           </p:cNvPr>
@@ -2162,7 +2162,7 @@
           <p:cNvPr id="3" name="日付プレースホルダー 2">
             <a:extLst>
               <a:ext uri="{FF2B5EF4-FFF2-40B4-BE49-F238E27FC236}">
-                <a16:creationId xmlns:a16="http://schemas.microsoft.com/office/drawing/2014/main" id="{4EBB94D5-A7EA-0430-6A50-682EFA482204}"/>
+                <a16:creationId xmlns:a16="http://schemas.microsoft.com/office/drawing/2014/main" id="{72002B5D-E187-6878-EB0B-4C339D162CDE}"/>
               </a:ext>
             </a:extLst>
           </p:cNvPr>
@@ -2178,7 +2178,7 @@
           <a:bodyPr/>
           <a:lstStyle/>
           <a:p>
-            <a:fld id="{384B06E5-7D3D-4E91-9485-314C13BE2CD6}" type="datetimeFigureOut">
+            <a:fld id="{613F318F-0286-42A3-B4C5-AF963E0EF8C7}" type="datetimeFigureOut">
               <a:rPr kumimoji="1" lang="ja-JP" altLang="en-US" smtClean="0"/>
               <a:t>2026/7/30</a:t>
             </a:fld>
@@ -2191,7 +2191,7 @@
           <p:cNvPr id="4" name="フッター プレースホルダー 3">
             <a:extLst>
               <a:ext uri="{FF2B5EF4-FFF2-40B4-BE49-F238E27FC236}">
-                <a16:creationId xmlns:a16="http://schemas.microsoft.com/office/drawing/2014/main" id="{3BA9528B-CB0B-A512-5C74-6CFCE320B471}"/>
+                <a16:creationId xmlns:a16="http://schemas.microsoft.com/office/drawing/2014/main" id="{76848032-0547-0A3F-E0F0-08F761A3AEB3}"/>
               </a:ext>
             </a:extLst>
           </p:cNvPr>
@@ -2216,7 +2216,7 @@
           <p:cNvPr id="5" name="スライド番号プレースホルダー 4">
             <a:extLst>
               <a:ext uri="{FF2B5EF4-FFF2-40B4-BE49-F238E27FC236}">
-                <a16:creationId xmlns:a16="http://schemas.microsoft.com/office/drawing/2014/main" id="{A827C2CF-FFDA-6BE3-62F6-8605F2BA7F8E}"/>
+                <a16:creationId xmlns:a16="http://schemas.microsoft.com/office/drawing/2014/main" id="{C76CEF19-50C4-0879-2B96-9C076C404B42}"/>
               </a:ext>
             </a:extLst>
           </p:cNvPr>
@@ -2232,7 +2232,7 @@
           <a:bodyPr/>
           <a:lstStyle/>
           <a:p>
-            <a:fld id="{F345249A-52B0-4A96-8A09-0420A53F285B}" type="slidenum">
+            <a:fld id="{CF235A59-D3CA-4A18-84D9-4CB90E6C5DC8}" type="slidenum">
               <a:rPr kumimoji="1" lang="ja-JP" altLang="en-US" smtClean="0"/>
               <a:t>‹#›</a:t>
             </a:fld>
@@ -2243,7 +2243,7 @@
     </p:spTree>
     <p:extLst>
       <p:ext uri="{BB962C8B-B14F-4D97-AF65-F5344CB8AC3E}">
-        <p14:creationId xmlns:p14="http://schemas.microsoft.com/office/powerpoint/2010/main" val="3090465228"/>
+        <p14:creationId xmlns:p14="http://schemas.microsoft.com/office/powerpoint/2010/main" val="3515920160"/>
       </p:ext>
     </p:extLst>
   </p:cSld>
@@ -2275,7 +2275,7 @@
           <p:cNvPr id="2" name="日付プレースホルダー 1">
             <a:extLst>
               <a:ext uri="{FF2B5EF4-FFF2-40B4-BE49-F238E27FC236}">
-                <a16:creationId xmlns:a16="http://schemas.microsoft.com/office/drawing/2014/main" id="{34B74881-F91C-B476-E0D9-CF509848683A}"/>
+                <a16:creationId xmlns:a16="http://schemas.microsoft.com/office/drawing/2014/main" id="{B49BEF0D-6433-2BBD-3337-079EF0B2B717}"/>
               </a:ext>
             </a:extLst>
           </p:cNvPr>
@@ -2291,7 +2291,7 @@
           <a:bodyPr/>
           <a:lstStyle/>
           <a:p>
-            <a:fld id="{384B06E5-7D3D-4E91-9485-314C13BE2CD6}" type="datetimeFigureOut">
+            <a:fld id="{613F318F-0286-42A3-B4C5-AF963E0EF8C7}" type="datetimeFigureOut">
               <a:rPr kumimoji="1" lang="ja-JP" altLang="en-US" smtClean="0"/>
               <a:t>2026/7/30</a:t>
             </a:fld>
@@ -2304,7 +2304,7 @@
           <p:cNvPr id="3" name="フッター プレースホルダー 2">
             <a:extLst>
               <a:ext uri="{FF2B5EF4-FFF2-40B4-BE49-F238E27FC236}">
-                <a16:creationId xmlns:a16="http://schemas.microsoft.com/office/drawing/2014/main" id="{A9670C96-7417-3DC9-4F09-36681D104740}"/>
+                <a16:creationId xmlns:a16="http://schemas.microsoft.com/office/drawing/2014/main" id="{27E2C272-F7F2-8FB3-C745-8E31058E870E}"/>
               </a:ext>
             </a:extLst>
           </p:cNvPr>
@@ -2329,7 +2329,7 @@
           <p:cNvPr id="4" name="スライド番号プレースホルダー 3">
             <a:extLst>
               <a:ext uri="{FF2B5EF4-FFF2-40B4-BE49-F238E27FC236}">
-                <a16:creationId xmlns:a16="http://schemas.microsoft.com/office/drawing/2014/main" id="{4678A6E6-9DF2-ABA9-367F-F85354B0CE71}"/>
+                <a16:creationId xmlns:a16="http://schemas.microsoft.com/office/drawing/2014/main" id="{1B4E7435-0ED7-84E7-A651-D9278DD7C213}"/>
               </a:ext>
             </a:extLst>
           </p:cNvPr>
@@ -2345,7 +2345,7 @@
           <a:bodyPr/>
           <a:lstStyle/>
           <a:p>
-            <a:fld id="{F345249A-52B0-4A96-8A09-0420A53F285B}" type="slidenum">
+            <a:fld id="{CF235A59-D3CA-4A18-84D9-4CB90E6C5DC8}" type="slidenum">
               <a:rPr kumimoji="1" lang="ja-JP" altLang="en-US" smtClean="0"/>
               <a:t>‹#›</a:t>
             </a:fld>
@@ -2356,7 +2356,7 @@
     </p:spTree>
     <p:extLst>
       <p:ext uri="{BB962C8B-B14F-4D97-AF65-F5344CB8AC3E}">
-        <p14:creationId xmlns:p14="http://schemas.microsoft.com/office/powerpoint/2010/main" val="833208292"/>
+        <p14:creationId xmlns:p14="http://schemas.microsoft.com/office/powerpoint/2010/main" val="2967596350"/>
       </p:ext>
     </p:extLst>
   </p:cSld>
@@ -2388,7 +2388,7 @@
           <p:cNvPr id="2" name="タイトル 1">
             <a:extLst>
               <a:ext uri="{FF2B5EF4-FFF2-40B4-BE49-F238E27FC236}">
-                <a16:creationId xmlns:a16="http://schemas.microsoft.com/office/drawing/2014/main" id="{04D296B0-4E0A-FAED-3A33-AD7391DC6A8B}"/>
+                <a16:creationId xmlns:a16="http://schemas.microsoft.com/office/drawing/2014/main" id="{BB1443DA-750D-84BC-C342-DE5A7326D952}"/>
               </a:ext>
             </a:extLst>
           </p:cNvPr>
@@ -2425,7 +2425,7 @@
           <p:cNvPr id="3" name="コンテンツ プレースホルダー 2">
             <a:extLst>
               <a:ext uri="{FF2B5EF4-FFF2-40B4-BE49-F238E27FC236}">
-                <a16:creationId xmlns:a16="http://schemas.microsoft.com/office/drawing/2014/main" id="{4BCB020D-5942-17D2-2778-1CE62CFF5805}"/>
+                <a16:creationId xmlns:a16="http://schemas.microsoft.com/office/drawing/2014/main" id="{A22B6B3D-A33D-EDEA-E18E-93AFB5B46CFD}"/>
               </a:ext>
             </a:extLst>
           </p:cNvPr>
@@ -2547,7 +2547,7 @@
           <p:cNvPr id="4" name="テキスト プレースホルダー 3">
             <a:extLst>
               <a:ext uri="{FF2B5EF4-FFF2-40B4-BE49-F238E27FC236}">
-                <a16:creationId xmlns:a16="http://schemas.microsoft.com/office/drawing/2014/main" id="{9177C927-7512-2BCF-C36C-D2496CA1DC1A}"/>
+                <a16:creationId xmlns:a16="http://schemas.microsoft.com/office/drawing/2014/main" id="{45DE7A9E-9E86-B821-5A1D-610DA8863759}"/>
               </a:ext>
             </a:extLst>
           </p:cNvPr>
@@ -2618,7 +2618,7 @@
           <p:cNvPr id="5" name="日付プレースホルダー 4">
             <a:extLst>
               <a:ext uri="{FF2B5EF4-FFF2-40B4-BE49-F238E27FC236}">
-                <a16:creationId xmlns:a16="http://schemas.microsoft.com/office/drawing/2014/main" id="{448A5FAE-8E7D-54C4-EC8D-5109FBA62467}"/>
+                <a16:creationId xmlns:a16="http://schemas.microsoft.com/office/drawing/2014/main" id="{017D713D-C0C7-FF80-1E64-7BD812BF45B0}"/>
               </a:ext>
             </a:extLst>
           </p:cNvPr>
@@ -2634,7 +2634,7 @@
           <a:bodyPr/>
           <a:lstStyle/>
           <a:p>
-            <a:fld id="{384B06E5-7D3D-4E91-9485-314C13BE2CD6}" type="datetimeFigureOut">
+            <a:fld id="{613F318F-0286-42A3-B4C5-AF963E0EF8C7}" type="datetimeFigureOut">
               <a:rPr kumimoji="1" lang="ja-JP" altLang="en-US" smtClean="0"/>
               <a:t>2026/7/30</a:t>
             </a:fld>
@@ -2647,7 +2647,7 @@
           <p:cNvPr id="6" name="フッター プレースホルダー 5">
             <a:extLst>
               <a:ext uri="{FF2B5EF4-FFF2-40B4-BE49-F238E27FC236}">
-                <a16:creationId xmlns:a16="http://schemas.microsoft.com/office/drawing/2014/main" id="{D3978172-E9CC-7586-F88B-9789FB3402F0}"/>
+                <a16:creationId xmlns:a16="http://schemas.microsoft.com/office/drawing/2014/main" id="{6E4D39A9-EBBB-BC16-C702-95D07E8DD666}"/>
               </a:ext>
             </a:extLst>
           </p:cNvPr>
@@ -2672,7 +2672,7 @@
           <p:cNvPr id="7" name="スライド番号プレースホルダー 6">
             <a:extLst>
               <a:ext uri="{FF2B5EF4-FFF2-40B4-BE49-F238E27FC236}">
-                <a16:creationId xmlns:a16="http://schemas.microsoft.com/office/drawing/2014/main" id="{32990AE1-3871-F885-EBEF-E625EA56C7D3}"/>
+                <a16:creationId xmlns:a16="http://schemas.microsoft.com/office/drawing/2014/main" id="{59684657-1CA3-DBBE-9DDF-9661A3E1FF53}"/>
               </a:ext>
             </a:extLst>
           </p:cNvPr>
@@ -2688,7 +2688,7 @@
           <a:bodyPr/>
           <a:lstStyle/>
           <a:p>
-            <a:fld id="{F345249A-52B0-4A96-8A09-0420A53F285B}" type="slidenum">
+            <a:fld id="{CF235A59-D3CA-4A18-84D9-4CB90E6C5DC8}" type="slidenum">
               <a:rPr kumimoji="1" lang="ja-JP" altLang="en-US" smtClean="0"/>
               <a:t>‹#›</a:t>
             </a:fld>
@@ -2699,7 +2699,7 @@
     </p:spTree>
     <p:extLst>
       <p:ext uri="{BB962C8B-B14F-4D97-AF65-F5344CB8AC3E}">
-        <p14:creationId xmlns:p14="http://schemas.microsoft.com/office/powerpoint/2010/main" val="606552932"/>
+        <p14:creationId xmlns:p14="http://schemas.microsoft.com/office/powerpoint/2010/main" val="824843522"/>
       </p:ext>
     </p:extLst>
   </p:cSld>
@@ -2731,7 +2731,7 @@
           <p:cNvPr id="2" name="タイトル 1">
             <a:extLst>
               <a:ext uri="{FF2B5EF4-FFF2-40B4-BE49-F238E27FC236}">
-                <a16:creationId xmlns:a16="http://schemas.microsoft.com/office/drawing/2014/main" id="{C76B2D9E-4342-A4E7-0C06-13B9773BA667}"/>
+                <a16:creationId xmlns:a16="http://schemas.microsoft.com/office/drawing/2014/main" id="{5CA5D86A-DBDA-1C82-2E38-8BD83F8811FA}"/>
               </a:ext>
             </a:extLst>
           </p:cNvPr>
@@ -2768,7 +2768,7 @@
           <p:cNvPr id="3" name="図プレースホルダー 2">
             <a:extLst>
               <a:ext uri="{FF2B5EF4-FFF2-40B4-BE49-F238E27FC236}">
-                <a16:creationId xmlns:a16="http://schemas.microsoft.com/office/drawing/2014/main" id="{F01C06B7-D93F-6400-A2AD-78CEE71E3E33}"/>
+                <a16:creationId xmlns:a16="http://schemas.microsoft.com/office/drawing/2014/main" id="{7598302C-4B74-2D94-23EA-68EC88F6521E}"/>
               </a:ext>
             </a:extLst>
           </p:cNvPr>
@@ -2835,7 +2835,7 @@
           <p:cNvPr id="4" name="テキスト プレースホルダー 3">
             <a:extLst>
               <a:ext uri="{FF2B5EF4-FFF2-40B4-BE49-F238E27FC236}">
-                <a16:creationId xmlns:a16="http://schemas.microsoft.com/office/drawing/2014/main" id="{230838B6-7CAA-FD16-276E-A30D81A4DB73}"/>
+                <a16:creationId xmlns:a16="http://schemas.microsoft.com/office/drawing/2014/main" id="{AEAB30C3-5E44-48C8-CA2F-92A4CB5A4FA5}"/>
               </a:ext>
             </a:extLst>
           </p:cNvPr>
@@ -2906,7 +2906,7 @@
           <p:cNvPr id="5" name="日付プレースホルダー 4">
             <a:extLst>
               <a:ext uri="{FF2B5EF4-FFF2-40B4-BE49-F238E27FC236}">
-                <a16:creationId xmlns:a16="http://schemas.microsoft.com/office/drawing/2014/main" id="{30CC7616-9DFA-F2F0-0360-11CF5E3E71FD}"/>
+                <a16:creationId xmlns:a16="http://schemas.microsoft.com/office/drawing/2014/main" id="{818C6893-DFDE-3711-BB49-0EDAF03A1A6E}"/>
               </a:ext>
             </a:extLst>
           </p:cNvPr>
@@ -2922,7 +2922,7 @@
           <a:bodyPr/>
           <a:lstStyle/>
           <a:p>
-            <a:fld id="{384B06E5-7D3D-4E91-9485-314C13BE2CD6}" type="datetimeFigureOut">
+            <a:fld id="{613F318F-0286-42A3-B4C5-AF963E0EF8C7}" type="datetimeFigureOut">
               <a:rPr kumimoji="1" lang="ja-JP" altLang="en-US" smtClean="0"/>
               <a:t>2026/7/30</a:t>
             </a:fld>
@@ -2935,7 +2935,7 @@
           <p:cNvPr id="6" name="フッター プレースホルダー 5">
             <a:extLst>
               <a:ext uri="{FF2B5EF4-FFF2-40B4-BE49-F238E27FC236}">
-                <a16:creationId xmlns:a16="http://schemas.microsoft.com/office/drawing/2014/main" id="{D0A9379F-D42F-6087-A6D0-26C0CCFCAC7C}"/>
+                <a16:creationId xmlns:a16="http://schemas.microsoft.com/office/drawing/2014/main" id="{EECD4FFC-6DC2-DA5F-EEDF-A05601BD1F83}"/>
               </a:ext>
             </a:extLst>
           </p:cNvPr>
@@ -2960,7 +2960,7 @@
           <p:cNvPr id="7" name="スライド番号プレースホルダー 6">
             <a:extLst>
               <a:ext uri="{FF2B5EF4-FFF2-40B4-BE49-F238E27FC236}">
-                <a16:creationId xmlns:a16="http://schemas.microsoft.com/office/drawing/2014/main" id="{1BD01A3C-2968-7504-9084-98677581D89B}"/>
+                <a16:creationId xmlns:a16="http://schemas.microsoft.com/office/drawing/2014/main" id="{E9E5DB2A-6033-76B8-A6FE-38D29AE2E541}"/>
               </a:ext>
             </a:extLst>
           </p:cNvPr>
@@ -2976,7 +2976,7 @@
           <a:bodyPr/>
           <a:lstStyle/>
           <a:p>
-            <a:fld id="{F345249A-52B0-4A96-8A09-0420A53F285B}" type="slidenum">
+            <a:fld id="{CF235A59-D3CA-4A18-84D9-4CB90E6C5DC8}" type="slidenum">
               <a:rPr kumimoji="1" lang="ja-JP" altLang="en-US" smtClean="0"/>
               <a:t>‹#›</a:t>
             </a:fld>
@@ -2987,7 +2987,7 @@
     </p:spTree>
     <p:extLst>
       <p:ext uri="{BB962C8B-B14F-4D97-AF65-F5344CB8AC3E}">
-        <p14:creationId xmlns:p14="http://schemas.microsoft.com/office/powerpoint/2010/main" val="861980874"/>
+        <p14:creationId xmlns:p14="http://schemas.microsoft.com/office/powerpoint/2010/main" val="618223393"/>
       </p:ext>
     </p:extLst>
   </p:cSld>
@@ -3024,7 +3024,7 @@
           <p:cNvPr id="2" name="タイトル プレースホルダー 1">
             <a:extLst>
               <a:ext uri="{FF2B5EF4-FFF2-40B4-BE49-F238E27FC236}">
-                <a16:creationId xmlns:a16="http://schemas.microsoft.com/office/drawing/2014/main" id="{0B86A4E3-0B80-750B-E3CA-B89DFA5F54E0}"/>
+                <a16:creationId xmlns:a16="http://schemas.microsoft.com/office/drawing/2014/main" id="{7A385B94-1322-2E2A-E892-324E48ED5BA9}"/>
               </a:ext>
             </a:extLst>
           </p:cNvPr>
@@ -3062,7 +3062,7 @@
           <p:cNvPr id="3" name="テキスト プレースホルダー 2">
             <a:extLst>
               <a:ext uri="{FF2B5EF4-FFF2-40B4-BE49-F238E27FC236}">
-                <a16:creationId xmlns:a16="http://schemas.microsoft.com/office/drawing/2014/main" id="{E8608FE2-005C-8F9D-39E2-08FEE3E84887}"/>
+                <a16:creationId xmlns:a16="http://schemas.microsoft.com/office/drawing/2014/main" id="{60FAEADF-48A8-AFFA-7078-3B1CB4F0E0BC}"/>
               </a:ext>
             </a:extLst>
           </p:cNvPr>
@@ -3161,7 +3161,7 @@
           <p:cNvPr id="4" name="日付プレースホルダー 3">
             <a:extLst>
               <a:ext uri="{FF2B5EF4-FFF2-40B4-BE49-F238E27FC236}">
-                <a16:creationId xmlns:a16="http://schemas.microsoft.com/office/drawing/2014/main" id="{839F9F56-0E83-0649-7C73-5CCF165A1911}"/>
+                <a16:creationId xmlns:a16="http://schemas.microsoft.com/office/drawing/2014/main" id="{615134CC-34BF-6F0E-AB7C-486E691188FF}"/>
               </a:ext>
             </a:extLst>
           </p:cNvPr>
@@ -3195,7 +3195,7 @@
             </a:lvl1pPr>
           </a:lstStyle>
           <a:p>
-            <a:fld id="{384B06E5-7D3D-4E91-9485-314C13BE2CD6}" type="datetimeFigureOut">
+            <a:fld id="{613F318F-0286-42A3-B4C5-AF963E0EF8C7}" type="datetimeFigureOut">
               <a:rPr kumimoji="1" lang="ja-JP" altLang="en-US" smtClean="0"/>
               <a:t>2026/7/30</a:t>
             </a:fld>
@@ -3208,7 +3208,7 @@
           <p:cNvPr id="5" name="フッター プレースホルダー 4">
             <a:extLst>
               <a:ext uri="{FF2B5EF4-FFF2-40B4-BE49-F238E27FC236}">
-                <a16:creationId xmlns:a16="http://schemas.microsoft.com/office/drawing/2014/main" id="{629F4E12-564C-0912-A6AF-62838543757E}"/>
+                <a16:creationId xmlns:a16="http://schemas.microsoft.com/office/drawing/2014/main" id="{5BF79DD2-17D0-68F3-98AD-5254E5C0D87E}"/>
               </a:ext>
             </a:extLst>
           </p:cNvPr>
@@ -3251,7 +3251,7 @@
           <p:cNvPr id="6" name="スライド番号プレースホルダー 5">
             <a:extLst>
               <a:ext uri="{FF2B5EF4-FFF2-40B4-BE49-F238E27FC236}">
-                <a16:creationId xmlns:a16="http://schemas.microsoft.com/office/drawing/2014/main" id="{3267492C-5160-9B0A-1ADD-87DA1EB697BC}"/>
+                <a16:creationId xmlns:a16="http://schemas.microsoft.com/office/drawing/2014/main" id="{78407532-384E-A6CC-537B-0AA2BEA48EB9}"/>
               </a:ext>
             </a:extLst>
           </p:cNvPr>
@@ -3285,7 +3285,7 @@
             </a:lvl1pPr>
           </a:lstStyle>
           <a:p>
-            <a:fld id="{F345249A-52B0-4A96-8A09-0420A53F285B}" type="slidenum">
+            <a:fld id="{CF235A59-D3CA-4A18-84D9-4CB90E6C5DC8}" type="slidenum">
               <a:rPr kumimoji="1" lang="ja-JP" altLang="en-US" smtClean="0"/>
               <a:t>‹#›</a:t>
             </a:fld>
@@ -3296,7 +3296,7 @@
     </p:spTree>
     <p:extLst>
       <p:ext uri="{BB962C8B-B14F-4D97-AF65-F5344CB8AC3E}">
-        <p14:creationId xmlns:p14="http://schemas.microsoft.com/office/powerpoint/2010/main" val="546869688"/>
+        <p14:creationId xmlns:p14="http://schemas.microsoft.com/office/powerpoint/2010/main" val="3183955849"/>
       </p:ext>
     </p:extLst>
   </p:cSld>
@@ -3619,7 +3619,7 @@
           <p:cNvPr id="2" name="テキスト ボックス 1">
             <a:extLst>
               <a:ext uri="{FF2B5EF4-FFF2-40B4-BE49-F238E27FC236}">
-                <a16:creationId xmlns:a16="http://schemas.microsoft.com/office/drawing/2014/main" id="{8F581CFD-1047-02AF-EC22-B6FCEB335311}"/>
+                <a16:creationId xmlns:a16="http://schemas.microsoft.com/office/drawing/2014/main" id="{BB224A56-C1DE-68BD-FA15-14BA55CC0695}"/>
               </a:ext>
             </a:extLst>
           </p:cNvPr>
@@ -3665,7 +3665,7 @@
           <p:cNvPr id="3" name="テキスト ボックス 2">
             <a:extLst>
               <a:ext uri="{FF2B5EF4-FFF2-40B4-BE49-F238E27FC236}">
-                <a16:creationId xmlns:a16="http://schemas.microsoft.com/office/drawing/2014/main" id="{4595B077-6F0E-D9FD-8A91-DD03ECF7B20B}"/>
+                <a16:creationId xmlns:a16="http://schemas.microsoft.com/office/drawing/2014/main" id="{E795A6CC-FB85-A510-A24D-2E88C8B23C60}"/>
               </a:ext>
             </a:extLst>
           </p:cNvPr>
@@ -3695,14 +3695,17 @@
                 </a:solidFill>
                 <a:latin typeface="Arial" panose="020B0604020202020204" pitchFamily="34" charset="0"/>
               </a:rPr>
-              <a:t>miseoshi-app TECH EXPLANATION</a:t>
-            </a:r>
-            <a:endParaRPr kumimoji="1" lang="ja-JP" altLang="en-US" sz="3400" b="1">
-              <a:solidFill>
-                <a:srgbClr val="111111"/>
-              </a:solidFill>
-              <a:latin typeface="Arial" panose="020B0604020202020204" pitchFamily="34" charset="0"/>
-            </a:endParaRPr>
+              <a:t>Miseoshi App</a:t>
+            </a:r>
+            <a:r>
+              <a:rPr kumimoji="1" lang="ja-JP" altLang="en-US" sz="3400" b="1">
+                <a:solidFill>
+                  <a:srgbClr val="111111"/>
+                </a:solidFill>
+                <a:latin typeface="Arial" panose="020B0604020202020204" pitchFamily="34" charset="0"/>
+              </a:rPr>
+              <a:t>の技術解説</a:t>
+            </a:r>
           </a:p>
         </p:txBody>
       </p:sp>
@@ -3711,7 +3714,7 @@
           <p:cNvPr id="4" name="テキスト ボックス 3">
             <a:extLst>
               <a:ext uri="{FF2B5EF4-FFF2-40B4-BE49-F238E27FC236}">
-                <a16:creationId xmlns:a16="http://schemas.microsoft.com/office/drawing/2014/main" id="{1FE3718E-C871-E403-292D-5A1387999102}"/>
+                <a16:creationId xmlns:a16="http://schemas.microsoft.com/office/drawing/2014/main" id="{624FF47B-563A-61F8-357E-AB1226299278}"/>
               </a:ext>
             </a:extLst>
           </p:cNvPr>
@@ -3735,20 +3738,14 @@
           <a:lstStyle/>
           <a:p>
             <a:r>
-              <a:rPr kumimoji="1" lang="en-US" altLang="ja-JP" sz="2000">
+              <a:rPr kumimoji="1" lang="ja-JP" altLang="en-US" sz="2000">
                 <a:solidFill>
                   <a:srgbClr val="333333"/>
                 </a:solidFill>
                 <a:latin typeface="Arial" panose="020B0604020202020204" pitchFamily="34" charset="0"/>
               </a:rPr>
-              <a:t>Architecture, implementation and commit history in 75 seconds</a:t>
-            </a:r>
-            <a:endParaRPr kumimoji="1" lang="ja-JP" altLang="en-US" sz="2000">
-              <a:solidFill>
-                <a:srgbClr val="333333"/>
-              </a:solidFill>
-              <a:latin typeface="Arial" panose="020B0604020202020204" pitchFamily="34" charset="0"/>
-            </a:endParaRPr>
+              <a:t>設計・実装・コミットから学ぶ短時間プレビュー</a:t>
+            </a:r>
           </a:p>
         </p:txBody>
       </p:sp>
@@ -3757,7 +3754,7 @@
           <p:cNvPr id="5" name="テキスト ボックス 4">
             <a:extLst>
               <a:ext uri="{FF2B5EF4-FFF2-40B4-BE49-F238E27FC236}">
-                <a16:creationId xmlns:a16="http://schemas.microsoft.com/office/drawing/2014/main" id="{53D0ACF1-285C-B89F-3A20-37B215043701}"/>
+                <a16:creationId xmlns:a16="http://schemas.microsoft.com/office/drawing/2014/main" id="{2E335708-4721-0EC6-187F-739EA8722A93}"/>
               </a:ext>
             </a:extLst>
           </p:cNvPr>
@@ -3804,7 +3801,7 @@
             <a:hlinkClick r:id="" action="ppaction://media"/>
             <a:extLst>
               <a:ext uri="{FF2B5EF4-FFF2-40B4-BE49-F238E27FC236}">
-                <a16:creationId xmlns:a16="http://schemas.microsoft.com/office/drawing/2014/main" id="{3CD1A7A8-E705-BD06-1DF4-642902B3E038}"/>
+                <a16:creationId xmlns:a16="http://schemas.microsoft.com/office/drawing/2014/main" id="{D8CE46DF-8E7A-7C27-52D3-B777336368BB}"/>
               </a:ext>
             </a:extLst>
           </p:cNvPr>
@@ -3839,7 +3836,7 @@
     </p:spTree>
     <p:extLst>
       <p:ext uri="{BB962C8B-B14F-4D97-AF65-F5344CB8AC3E}">
-        <p14:creationId xmlns:p14="http://schemas.microsoft.com/office/powerpoint/2010/main" val="2210200388"/>
+        <p14:creationId xmlns:p14="http://schemas.microsoft.com/office/powerpoint/2010/main" val="2548405706"/>
       </p:ext>
     </p:extLst>
   </p:cSld>
@@ -3963,7 +3960,7 @@
           <p:cNvPr id="2" name="テキスト ボックス 1">
             <a:extLst>
               <a:ext uri="{FF2B5EF4-FFF2-40B4-BE49-F238E27FC236}">
-                <a16:creationId xmlns:a16="http://schemas.microsoft.com/office/drawing/2014/main" id="{169AF1E3-B2A1-4B8A-4533-A9B86A6F3EBF}"/>
+                <a16:creationId xmlns:a16="http://schemas.microsoft.com/office/drawing/2014/main" id="{867CE4E5-1F88-9355-F6A5-137173C5945A}"/>
               </a:ext>
             </a:extLst>
           </p:cNvPr>
@@ -4009,7 +4006,7 @@
           <p:cNvPr id="3" name="テキスト ボックス 2">
             <a:extLst>
               <a:ext uri="{FF2B5EF4-FFF2-40B4-BE49-F238E27FC236}">
-                <a16:creationId xmlns:a16="http://schemas.microsoft.com/office/drawing/2014/main" id="{B932BDE2-54DB-10BE-9DCE-ED00A15C7CE2}"/>
+                <a16:creationId xmlns:a16="http://schemas.microsoft.com/office/drawing/2014/main" id="{34BE9F6A-1D52-1498-49DF-920DD92D301E}"/>
               </a:ext>
             </a:extLst>
           </p:cNvPr>
@@ -4033,20 +4030,14 @@
           <a:lstStyle/>
           <a:p>
             <a:r>
-              <a:rPr kumimoji="1" lang="en-US" altLang="ja-JP" sz="3400" b="1">
+              <a:rPr kumimoji="1" lang="ja-JP" altLang="en-US" sz="3400" b="1">
                 <a:solidFill>
                   <a:srgbClr val="111111"/>
                 </a:solidFill>
                 <a:latin typeface="Arial" panose="020B0604020202020204" pitchFamily="34" charset="0"/>
               </a:rPr>
-              <a:t>WHAT DOES IT SOLVE?</a:t>
-            </a:r>
-            <a:endParaRPr kumimoji="1" lang="ja-JP" altLang="en-US" sz="3400" b="1">
-              <a:solidFill>
-                <a:srgbClr val="111111"/>
-              </a:solidFill>
-              <a:latin typeface="Arial" panose="020B0604020202020204" pitchFamily="34" charset="0"/>
-            </a:endParaRPr>
+              <a:t>このプロジェクトは何を解決する？</a:t>
+            </a:r>
           </a:p>
         </p:txBody>
       </p:sp>
@@ -4055,7 +4046,7 @@
           <p:cNvPr id="4" name="テキスト ボックス 3">
             <a:extLst>
               <a:ext uri="{FF2B5EF4-FFF2-40B4-BE49-F238E27FC236}">
-                <a16:creationId xmlns:a16="http://schemas.microsoft.com/office/drawing/2014/main" id="{B948B056-4F42-06A8-9BAC-22D1E5917721}"/>
+                <a16:creationId xmlns:a16="http://schemas.microsoft.com/office/drawing/2014/main" id="{1049EDFB-52E4-1D2E-DA7D-93B6542BA1CC}"/>
               </a:ext>
             </a:extLst>
           </p:cNvPr>
@@ -4122,7 +4113,7 @@
           <p:cNvPr id="5" name="テキスト ボックス 4">
             <a:extLst>
               <a:ext uri="{FF2B5EF4-FFF2-40B4-BE49-F238E27FC236}">
-                <a16:creationId xmlns:a16="http://schemas.microsoft.com/office/drawing/2014/main" id="{F6A34ADF-33EC-1DD3-E4DE-54F871643E4B}"/>
+                <a16:creationId xmlns:a16="http://schemas.microsoft.com/office/drawing/2014/main" id="{31D4B51E-B3BA-3FB9-6522-3DFC02BF9C77}"/>
               </a:ext>
             </a:extLst>
           </p:cNvPr>
@@ -4169,7 +4160,7 @@
             <a:hlinkClick r:id="" action="ppaction://media"/>
             <a:extLst>
               <a:ext uri="{FF2B5EF4-FFF2-40B4-BE49-F238E27FC236}">
-                <a16:creationId xmlns:a16="http://schemas.microsoft.com/office/drawing/2014/main" id="{A786D2CF-8A3F-AA06-DF8F-DB5E13877DC3}"/>
+                <a16:creationId xmlns:a16="http://schemas.microsoft.com/office/drawing/2014/main" id="{3A370FA2-CB90-474B-5375-D8F944C7CFCE}"/>
               </a:ext>
             </a:extLst>
           </p:cNvPr>
@@ -4204,7 +4195,7 @@
     </p:spTree>
     <p:extLst>
       <p:ext uri="{BB962C8B-B14F-4D97-AF65-F5344CB8AC3E}">
-        <p14:creationId xmlns:p14="http://schemas.microsoft.com/office/powerpoint/2010/main" val="1676813627"/>
+        <p14:creationId xmlns:p14="http://schemas.microsoft.com/office/powerpoint/2010/main" val="4068413404"/>
       </p:ext>
     </p:extLst>
   </p:cSld>
@@ -4328,7 +4319,7 @@
           <p:cNvPr id="2" name="テキスト ボックス 1">
             <a:extLst>
               <a:ext uri="{FF2B5EF4-FFF2-40B4-BE49-F238E27FC236}">
-                <a16:creationId xmlns:a16="http://schemas.microsoft.com/office/drawing/2014/main" id="{9D2681B3-F1BC-9B8C-E699-6DFD9C89F0B1}"/>
+                <a16:creationId xmlns:a16="http://schemas.microsoft.com/office/drawing/2014/main" id="{08328A0C-EA15-5CD3-B7F2-6669EF559EE7}"/>
               </a:ext>
             </a:extLst>
           </p:cNvPr>
@@ -4374,7 +4365,7 @@
           <p:cNvPr id="3" name="テキスト ボックス 2">
             <a:extLst>
               <a:ext uri="{FF2B5EF4-FFF2-40B4-BE49-F238E27FC236}">
-                <a16:creationId xmlns:a16="http://schemas.microsoft.com/office/drawing/2014/main" id="{497355AF-65A1-1477-472F-7B7643CFB249}"/>
+                <a16:creationId xmlns:a16="http://schemas.microsoft.com/office/drawing/2014/main" id="{EC8DC2D8-B8AE-E44E-DC09-7BE733167290}"/>
               </a:ext>
             </a:extLst>
           </p:cNvPr>
@@ -4398,20 +4389,14 @@
           <a:lstStyle/>
           <a:p>
             <a:r>
-              <a:rPr kumimoji="1" lang="en-US" altLang="ja-JP" sz="3400" b="1">
+              <a:rPr kumimoji="1" lang="ja-JP" altLang="en-US" sz="3400" b="1">
                 <a:solidFill>
                   <a:srgbClr val="111111"/>
                 </a:solidFill>
                 <a:latin typeface="Arial" panose="020B0604020202020204" pitchFamily="34" charset="0"/>
               </a:rPr>
-              <a:t>TECH STACK</a:t>
-            </a:r>
-            <a:endParaRPr kumimoji="1" lang="ja-JP" altLang="en-US" sz="3400" b="1">
-              <a:solidFill>
-                <a:srgbClr val="111111"/>
-              </a:solidFill>
-              <a:latin typeface="Arial" panose="020B0604020202020204" pitchFamily="34" charset="0"/>
-            </a:endParaRPr>
+              <a:t>技術スタック</a:t>
+            </a:r>
           </a:p>
         </p:txBody>
       </p:sp>
@@ -4420,7 +4405,7 @@
           <p:cNvPr id="4" name="テキスト ボックス 3">
             <a:extLst>
               <a:ext uri="{FF2B5EF4-FFF2-40B4-BE49-F238E27FC236}">
-                <a16:creationId xmlns:a16="http://schemas.microsoft.com/office/drawing/2014/main" id="{E6261FD2-767D-C6D3-9C3E-068C02DE3C01}"/>
+                <a16:creationId xmlns:a16="http://schemas.microsoft.com/office/drawing/2014/main" id="{0569AE7A-C727-B412-01CD-D8C05882B6E5}"/>
               </a:ext>
             </a:extLst>
           </p:cNvPr>
@@ -4430,7 +4415,7 @@
         <p:spPr>
           <a:xfrm>
             <a:off x="533400" y="3429000"/>
-            <a:ext cx="10795000" cy="400110"/>
+            <a:ext cx="10795000" cy="707886"/>
           </a:xfrm>
           <a:prstGeom prst="rect">
             <a:avLst/>
@@ -4444,13 +4429,22 @@
           <a:lstStyle/>
           <a:p>
             <a:r>
+              <a:rPr kumimoji="1" lang="ja-JP" altLang="en-US" sz="2000">
+                <a:solidFill>
+                  <a:srgbClr val="333333"/>
+                </a:solidFill>
+                <a:latin typeface="Arial" panose="020B0604020202020204" pitchFamily="34" charset="0"/>
+              </a:rPr>
+              <a:t>主要技術：</a:t>
+            </a:r>
+            <a:r>
               <a:rPr kumimoji="1" lang="en-US" altLang="ja-JP" sz="2000">
                 <a:solidFill>
                   <a:srgbClr val="333333"/>
                 </a:solidFill>
                 <a:latin typeface="Arial" panose="020B0604020202020204" pitchFamily="34" charset="0"/>
               </a:rPr>
-              <a:t>Primary technologies: TypeScript</a:t>
+              <a:t>TypeScript</a:t>
             </a:r>
             <a:r>
               <a:rPr kumimoji="1" lang="ja-JP" altLang="en-US" sz="2000">
@@ -4468,14 +4462,18 @@
                 </a:solidFill>
                 <a:latin typeface="Arial" panose="020B0604020202020204" pitchFamily="34" charset="0"/>
               </a:rPr>
-              <a:t>JavaScript</a:t>
-            </a:r>
-            <a:endParaRPr kumimoji="1" lang="ja-JP" altLang="en-US" sz="2000">
-              <a:solidFill>
-                <a:srgbClr val="333333"/>
-              </a:solidFill>
-              <a:latin typeface="Arial" panose="020B0604020202020204" pitchFamily="34" charset="0"/>
-            </a:endParaRPr>
+              <a:t>JavaScript
+</a:t>
+            </a:r>
+            <a:r>
+              <a:rPr kumimoji="1" lang="ja-JP" altLang="en-US" sz="2000">
+                <a:solidFill>
+                  <a:srgbClr val="333333"/>
+                </a:solidFill>
+                <a:latin typeface="Arial" panose="020B0604020202020204" pitchFamily="34" charset="0"/>
+              </a:rPr>
+              <a:t>役割を分け、保守しやすい構成を目指しています。</a:t>
+            </a:r>
           </a:p>
         </p:txBody>
       </p:sp>
@@ -4484,7 +4482,7 @@
           <p:cNvPr id="5" name="テキスト ボックス 4">
             <a:extLst>
               <a:ext uri="{FF2B5EF4-FFF2-40B4-BE49-F238E27FC236}">
-                <a16:creationId xmlns:a16="http://schemas.microsoft.com/office/drawing/2014/main" id="{5EF41D36-0BF8-75B3-E278-08026B62DF4B}"/>
+                <a16:creationId xmlns:a16="http://schemas.microsoft.com/office/drawing/2014/main" id="{26DA9E16-70D4-DA0D-83B7-CF02F7C9B042}"/>
               </a:ext>
             </a:extLst>
           </p:cNvPr>
@@ -4531,7 +4529,7 @@
             <a:hlinkClick r:id="" action="ppaction://media"/>
             <a:extLst>
               <a:ext uri="{FF2B5EF4-FFF2-40B4-BE49-F238E27FC236}">
-                <a16:creationId xmlns:a16="http://schemas.microsoft.com/office/drawing/2014/main" id="{9E203B4D-E465-C34B-F3E5-E148459B3482}"/>
+                <a16:creationId xmlns:a16="http://schemas.microsoft.com/office/drawing/2014/main" id="{0343DC90-1FC6-4FC6-34FE-7CFEB32DDF13}"/>
               </a:ext>
             </a:extLst>
           </p:cNvPr>
@@ -4566,7 +4564,7 @@
     </p:spTree>
     <p:extLst>
       <p:ext uri="{BB962C8B-B14F-4D97-AF65-F5344CB8AC3E}">
-        <p14:creationId xmlns:p14="http://schemas.microsoft.com/office/powerpoint/2010/main" val="782927612"/>
+        <p14:creationId xmlns:p14="http://schemas.microsoft.com/office/powerpoint/2010/main" val="127915964"/>
       </p:ext>
     </p:extLst>
   </p:cSld>
@@ -4690,7 +4688,7 @@
           <p:cNvPr id="2" name="テキスト ボックス 1">
             <a:extLst>
               <a:ext uri="{FF2B5EF4-FFF2-40B4-BE49-F238E27FC236}">
-                <a16:creationId xmlns:a16="http://schemas.microsoft.com/office/drawing/2014/main" id="{329C7FF4-EACC-FB9A-67F8-F17FBC775780}"/>
+                <a16:creationId xmlns:a16="http://schemas.microsoft.com/office/drawing/2014/main" id="{52123447-4BAE-586C-2764-2B90A5F00D1B}"/>
               </a:ext>
             </a:extLst>
           </p:cNvPr>
@@ -4736,7 +4734,7 @@
           <p:cNvPr id="3" name="テキスト ボックス 2">
             <a:extLst>
               <a:ext uri="{FF2B5EF4-FFF2-40B4-BE49-F238E27FC236}">
-                <a16:creationId xmlns:a16="http://schemas.microsoft.com/office/drawing/2014/main" id="{7859AF85-4A90-C675-3A0D-AFA926F63EE3}"/>
+                <a16:creationId xmlns:a16="http://schemas.microsoft.com/office/drawing/2014/main" id="{2B1BCAB6-A622-43BC-1D30-5CC0330C62D1}"/>
               </a:ext>
             </a:extLst>
           </p:cNvPr>
@@ -4760,20 +4758,14 @@
           <a:lstStyle/>
           <a:p>
             <a:r>
-              <a:rPr kumimoji="1" lang="en-US" altLang="ja-JP" sz="3400" b="1">
+              <a:rPr kumimoji="1" lang="ja-JP" altLang="en-US" sz="3400" b="1">
                 <a:solidFill>
                   <a:srgbClr val="111111"/>
                 </a:solidFill>
                 <a:latin typeface="Arial" panose="020B0604020202020204" pitchFamily="34" charset="0"/>
               </a:rPr>
-              <a:t>REPOSITORY HIGHLIGHTS</a:t>
-            </a:r>
-            <a:endParaRPr kumimoji="1" lang="ja-JP" altLang="en-US" sz="3400" b="1">
-              <a:solidFill>
-                <a:srgbClr val="111111"/>
-              </a:solidFill>
-              <a:latin typeface="Arial" panose="020B0604020202020204" pitchFamily="34" charset="0"/>
-            </a:endParaRPr>
+              <a:t>リポジトリの読みどころ</a:t>
+            </a:r>
           </a:p>
         </p:txBody>
       </p:sp>
@@ -4782,7 +4774,7 @@
           <p:cNvPr id="4" name="テキスト ボックス 3">
             <a:extLst>
               <a:ext uri="{FF2B5EF4-FFF2-40B4-BE49-F238E27FC236}">
-                <a16:creationId xmlns:a16="http://schemas.microsoft.com/office/drawing/2014/main" id="{C647508C-9ADE-C8D5-7BC0-5A3F9369C9E8}"/>
+                <a16:creationId xmlns:a16="http://schemas.microsoft.com/office/drawing/2014/main" id="{3EB99C78-2A4B-5762-D824-C7A5ACA2AA53}"/>
               </a:ext>
             </a:extLst>
           </p:cNvPr>
@@ -4792,7 +4784,7 @@
         <p:spPr>
           <a:xfrm>
             <a:off x="533400" y="3429000"/>
-            <a:ext cx="10795000" cy="400110"/>
+            <a:ext cx="10795000" cy="707886"/>
           </a:xfrm>
           <a:prstGeom prst="rect">
             <a:avLst/>
@@ -4806,13 +4798,77 @@
           <a:lstStyle/>
           <a:p>
             <a:r>
+              <a:rPr kumimoji="1" lang="ja-JP" altLang="en-US" sz="2000">
+                <a:solidFill>
+                  <a:srgbClr val="333333"/>
+                </a:solidFill>
+                <a:latin typeface="Arial" panose="020B0604020202020204" pitchFamily="34" charset="0"/>
+              </a:rPr>
+              <a:t>公開コード、</a:t>
+            </a:r>
+            <a:r>
               <a:rPr kumimoji="1" lang="en-US" altLang="ja-JP" sz="2000">
                 <a:solidFill>
                   <a:srgbClr val="333333"/>
                 </a:solidFill>
                 <a:latin typeface="Arial" panose="020B0604020202020204" pitchFamily="34" charset="0"/>
               </a:rPr>
-              <a:t>Public source code, README and commit history reveal the design decisions.</a:t>
+              <a:t>README</a:t>
+            </a:r>
+            <a:r>
+              <a:rPr kumimoji="1" lang="ja-JP" altLang="en-US" sz="2000">
+                <a:solidFill>
+                  <a:srgbClr val="333333"/>
+                </a:solidFill>
+                <a:latin typeface="Arial" panose="020B0604020202020204" pitchFamily="34" charset="0"/>
+              </a:rPr>
+              <a:t>、コミット履歴から設計判断を確認できます。
+主なファイル：</a:t>
+            </a:r>
+            <a:r>
+              <a:rPr kumimoji="1" lang="en-US" altLang="ja-JP" sz="2000">
+                <a:solidFill>
+                  <a:srgbClr val="333333"/>
+                </a:solidFill>
+                <a:latin typeface="Arial" panose="020B0604020202020204" pitchFamily="34" charset="0"/>
+              </a:rPr>
+              <a:t>README.md</a:t>
+            </a:r>
+            <a:r>
+              <a:rPr kumimoji="1" lang="ja-JP" altLang="en-US" sz="2000">
+                <a:solidFill>
+                  <a:srgbClr val="333333"/>
+                </a:solidFill>
+                <a:latin typeface="Arial" panose="020B0604020202020204" pitchFamily="34" charset="0"/>
+              </a:rPr>
+              <a:t>、</a:t>
+            </a:r>
+            <a:r>
+              <a:rPr kumimoji="1" lang="en-US" altLang="ja-JP" sz="2000">
+                <a:solidFill>
+                  <a:srgbClr val="333333"/>
+                </a:solidFill>
+                <a:latin typeface="Arial" panose="020B0604020202020204" pitchFamily="34" charset="0"/>
+              </a:rPr>
+              <a:t>app</a:t>
+            </a:r>
+            <a:r>
+              <a:rPr kumimoji="1" lang="ja-JP" altLang="en-US" sz="2000">
+                <a:solidFill>
+                  <a:srgbClr val="333333"/>
+                </a:solidFill>
+                <a:latin typeface="Arial" panose="020B0604020202020204" pitchFamily="34" charset="0"/>
+              </a:rPr>
+              <a:t>、</a:t>
+            </a:r>
+            <a:r>
+              <a:rPr kumimoji="1" lang="en-US" altLang="ja-JP" sz="2000">
+                <a:solidFill>
+                  <a:srgbClr val="333333"/>
+                </a:solidFill>
+                <a:latin typeface="Arial" panose="020B0604020202020204" pitchFamily="34" charset="0"/>
+              </a:rPr>
+              <a:t>build</a:t>
             </a:r>
             <a:endParaRPr kumimoji="1" lang="ja-JP" altLang="en-US" sz="2000">
               <a:solidFill>
@@ -4828,7 +4884,7 @@
           <p:cNvPr id="5" name="テキスト ボックス 4">
             <a:extLst>
               <a:ext uri="{FF2B5EF4-FFF2-40B4-BE49-F238E27FC236}">
-                <a16:creationId xmlns:a16="http://schemas.microsoft.com/office/drawing/2014/main" id="{A43417F2-CF40-E3BD-3863-51F1803CF6F0}"/>
+                <a16:creationId xmlns:a16="http://schemas.microsoft.com/office/drawing/2014/main" id="{7792B269-FCEB-38BE-B869-8E362E8DDAFC}"/>
               </a:ext>
             </a:extLst>
           </p:cNvPr>
@@ -4875,7 +4931,7 @@
             <a:hlinkClick r:id="" action="ppaction://media"/>
             <a:extLst>
               <a:ext uri="{FF2B5EF4-FFF2-40B4-BE49-F238E27FC236}">
-                <a16:creationId xmlns:a16="http://schemas.microsoft.com/office/drawing/2014/main" id="{F0E6B139-2DEF-A03D-F55F-B5F4D097B172}"/>
+                <a16:creationId xmlns:a16="http://schemas.microsoft.com/office/drawing/2014/main" id="{A3D58EB4-5DBF-96D7-944A-C900EE2709AC}"/>
               </a:ext>
             </a:extLst>
           </p:cNvPr>
@@ -4910,7 +4966,7 @@
     </p:spTree>
     <p:extLst>
       <p:ext uri="{BB962C8B-B14F-4D97-AF65-F5344CB8AC3E}">
-        <p14:creationId xmlns:p14="http://schemas.microsoft.com/office/powerpoint/2010/main" val="3626754127"/>
+        <p14:creationId xmlns:p14="http://schemas.microsoft.com/office/powerpoint/2010/main" val="2905787003"/>
       </p:ext>
     </p:extLst>
   </p:cSld>
@@ -5034,7 +5090,7 @@
           <p:cNvPr id="2" name="テキスト ボックス 1">
             <a:extLst>
               <a:ext uri="{FF2B5EF4-FFF2-40B4-BE49-F238E27FC236}">
-                <a16:creationId xmlns:a16="http://schemas.microsoft.com/office/drawing/2014/main" id="{4D720B20-6F5D-5644-6658-9A6DEBE9DD8C}"/>
+                <a16:creationId xmlns:a16="http://schemas.microsoft.com/office/drawing/2014/main" id="{78DD1AA4-F2BE-BABC-172A-F05D38D5234A}"/>
               </a:ext>
             </a:extLst>
           </p:cNvPr>
@@ -5080,7 +5136,7 @@
           <p:cNvPr id="3" name="テキスト ボックス 2">
             <a:extLst>
               <a:ext uri="{FF2B5EF4-FFF2-40B4-BE49-F238E27FC236}">
-                <a16:creationId xmlns:a16="http://schemas.microsoft.com/office/drawing/2014/main" id="{7BDFC8F4-BD21-718B-1467-7B2DC2C94EC7}"/>
+                <a16:creationId xmlns:a16="http://schemas.microsoft.com/office/drawing/2014/main" id="{416CC686-04E0-5A3E-FFDC-5202185C336C}"/>
               </a:ext>
             </a:extLst>
           </p:cNvPr>
@@ -5104,20 +5160,14 @@
           <a:lstStyle/>
           <a:p>
             <a:r>
-              <a:rPr kumimoji="1" lang="en-US" altLang="ja-JP" sz="3400" b="1">
+              <a:rPr kumimoji="1" lang="ja-JP" altLang="en-US" sz="3400" b="1">
                 <a:solidFill>
                   <a:srgbClr val="111111"/>
                 </a:solidFill>
                 <a:latin typeface="Arial" panose="020B0604020202020204" pitchFamily="34" charset="0"/>
               </a:rPr>
-              <a:t>ITERATIVE IMPROVEMENT</a:t>
-            </a:r>
-            <a:endParaRPr kumimoji="1" lang="ja-JP" altLang="en-US" sz="3400" b="1">
-              <a:solidFill>
-                <a:srgbClr val="111111"/>
-              </a:solidFill>
-              <a:latin typeface="Arial" panose="020B0604020202020204" pitchFamily="34" charset="0"/>
-            </a:endParaRPr>
+              <a:t>コミットから分かる改善</a:t>
+            </a:r>
           </a:p>
         </p:txBody>
       </p:sp>
@@ -5126,7 +5176,7 @@
           <p:cNvPr id="4" name="テキスト ボックス 3">
             <a:extLst>
               <a:ext uri="{FF2B5EF4-FFF2-40B4-BE49-F238E27FC236}">
-                <a16:creationId xmlns:a16="http://schemas.microsoft.com/office/drawing/2014/main" id="{B400D09D-51DC-EBB0-D9F9-1C3D6480B2DC}"/>
+                <a16:creationId xmlns:a16="http://schemas.microsoft.com/office/drawing/2014/main" id="{4CDB5E17-482C-7C83-2319-803B97391DA9}"/>
               </a:ext>
             </a:extLst>
           </p:cNvPr>
@@ -5156,7 +5206,7 @@
                 </a:solidFill>
                 <a:latin typeface="Arial" panose="020B0604020202020204" pitchFamily="34" charset="0"/>
               </a:rPr>
-              <a:t>Small commits continuously improve features, quality and release readiness.</a:t>
+              <a:t>Route admin domain to management console</a:t>
             </a:r>
             <a:endParaRPr kumimoji="1" lang="ja-JP" altLang="en-US" sz="2000">
               <a:solidFill>
@@ -5172,7 +5222,7 @@
           <p:cNvPr id="5" name="テキスト ボックス 4">
             <a:extLst>
               <a:ext uri="{FF2B5EF4-FFF2-40B4-BE49-F238E27FC236}">
-                <a16:creationId xmlns:a16="http://schemas.microsoft.com/office/drawing/2014/main" id="{8D9A92B1-11E3-476B-2E89-3667857592D1}"/>
+                <a16:creationId xmlns:a16="http://schemas.microsoft.com/office/drawing/2014/main" id="{F3AE2430-76E7-4D82-006A-B7296B523306}"/>
               </a:ext>
             </a:extLst>
           </p:cNvPr>
@@ -5219,7 +5269,7 @@
             <a:hlinkClick r:id="" action="ppaction://media"/>
             <a:extLst>
               <a:ext uri="{FF2B5EF4-FFF2-40B4-BE49-F238E27FC236}">
-                <a16:creationId xmlns:a16="http://schemas.microsoft.com/office/drawing/2014/main" id="{A38FEC83-AF0A-569F-CBED-ED2CB58751AF}"/>
+                <a16:creationId xmlns:a16="http://schemas.microsoft.com/office/drawing/2014/main" id="{E97D094E-14B8-0597-43F0-BE16F70FB18C}"/>
               </a:ext>
             </a:extLst>
           </p:cNvPr>
@@ -5254,7 +5304,7 @@
     </p:spTree>
     <p:extLst>
       <p:ext uri="{BB962C8B-B14F-4D97-AF65-F5344CB8AC3E}">
-        <p14:creationId xmlns:p14="http://schemas.microsoft.com/office/powerpoint/2010/main" val="606394972"/>
+        <p14:creationId xmlns:p14="http://schemas.microsoft.com/office/powerpoint/2010/main" val="1788195273"/>
       </p:ext>
     </p:extLst>
   </p:cSld>
@@ -5378,7 +5428,7 @@
           <p:cNvPr id="2" name="テキスト ボックス 1">
             <a:extLst>
               <a:ext uri="{FF2B5EF4-FFF2-40B4-BE49-F238E27FC236}">
-                <a16:creationId xmlns:a16="http://schemas.microsoft.com/office/drawing/2014/main" id="{BDC5689B-EA98-324C-80FD-7A16C7F72865}"/>
+                <a16:creationId xmlns:a16="http://schemas.microsoft.com/office/drawing/2014/main" id="{B91030A0-426A-8D49-9D67-BE724734C7D3}"/>
               </a:ext>
             </a:extLst>
           </p:cNvPr>
@@ -5424,7 +5474,7 @@
           <p:cNvPr id="3" name="テキスト ボックス 2">
             <a:extLst>
               <a:ext uri="{FF2B5EF4-FFF2-40B4-BE49-F238E27FC236}">
-                <a16:creationId xmlns:a16="http://schemas.microsoft.com/office/drawing/2014/main" id="{14B4D28C-A0E0-F27A-6D6B-974403061125}"/>
+                <a16:creationId xmlns:a16="http://schemas.microsoft.com/office/drawing/2014/main" id="{46B1C0CB-BFE2-6955-157B-F47074DD1A8D}"/>
               </a:ext>
             </a:extLst>
           </p:cNvPr>
@@ -5448,20 +5498,14 @@
           <a:lstStyle/>
           <a:p>
             <a:r>
-              <a:rPr kumimoji="1" lang="en-US" altLang="ja-JP" sz="3400" b="1">
+              <a:rPr kumimoji="1" lang="ja-JP" altLang="en-US" sz="3400" b="1">
                 <a:solidFill>
                   <a:srgbClr val="111111"/>
                 </a:solidFill>
                 <a:latin typeface="Arial" panose="020B0604020202020204" pitchFamily="34" charset="0"/>
               </a:rPr>
-              <a:t>READ THE FULL ARTICLE</a:t>
-            </a:r>
-            <a:endParaRPr kumimoji="1" lang="ja-JP" altLang="en-US" sz="3400" b="1">
-              <a:solidFill>
-                <a:srgbClr val="111111"/>
-              </a:solidFill>
-              <a:latin typeface="Arial" panose="020B0604020202020204" pitchFamily="34" charset="0"/>
-            </a:endParaRPr>
+              <a:t>詳しくは積み上げログへ</a:t>
+            </a:r>
           </a:p>
         </p:txBody>
       </p:sp>
@@ -5470,7 +5514,7 @@
           <p:cNvPr id="4" name="テキスト ボックス 3">
             <a:extLst>
               <a:ext uri="{FF2B5EF4-FFF2-40B4-BE49-F238E27FC236}">
-                <a16:creationId xmlns:a16="http://schemas.microsoft.com/office/drawing/2014/main" id="{B6704E56-0C7A-28B6-BD9A-C11E26862AB0}"/>
+                <a16:creationId xmlns:a16="http://schemas.microsoft.com/office/drawing/2014/main" id="{C8C597D8-691A-9C93-06B5-F977E145758A}"/>
               </a:ext>
             </a:extLst>
           </p:cNvPr>
@@ -5494,14 +5538,32 @@
           <a:lstStyle/>
           <a:p>
             <a:r>
-              <a:rPr kumimoji="1" lang="sv-SE" altLang="ja-JP" sz="2000">
+              <a:rPr kumimoji="1" lang="zh-TW" altLang="en-US" sz="2000">
+                <a:solidFill>
+                  <a:srgbClr val="333333"/>
+                </a:solidFill>
+                <a:latin typeface="Arial" panose="020B0604020202020204" pitchFamily="34" charset="0"/>
+              </a:rPr>
+              <a:t>記事： </a:t>
+            </a:r>
+            <a:r>
+              <a:rPr kumimoji="1" lang="en-US" altLang="zh-TW" sz="2000">
                 <a:solidFill>
                   <a:srgbClr val="333333"/>
                 </a:solidFill>
                 <a:latin typeface="Arial" panose="020B0604020202020204" pitchFamily="34" charset="0"/>
               </a:rPr>
               <a:t>https://syunnjack.dev/articles/miseoshi-app
-TSUMIAGE LOG</a:t>
+</a:t>
+            </a:r>
+            <a:r>
+              <a:rPr kumimoji="1" lang="zh-TW" altLang="en-US" sz="2000">
+                <a:solidFill>
+                  <a:srgbClr val="333333"/>
+                </a:solidFill>
+                <a:latin typeface="Arial" panose="020B0604020202020204" pitchFamily="34" charset="0"/>
+              </a:rPr>
+              <a:t>学び、作り、振り返る開発記録。</a:t>
             </a:r>
             <a:endParaRPr kumimoji="1" lang="ja-JP" altLang="en-US" sz="2000">
               <a:solidFill>
@@ -5517,7 +5579,7 @@
           <p:cNvPr id="5" name="テキスト ボックス 4">
             <a:extLst>
               <a:ext uri="{FF2B5EF4-FFF2-40B4-BE49-F238E27FC236}">
-                <a16:creationId xmlns:a16="http://schemas.microsoft.com/office/drawing/2014/main" id="{E66830CC-88C0-8395-1126-4657A9D5CE26}"/>
+                <a16:creationId xmlns:a16="http://schemas.microsoft.com/office/drawing/2014/main" id="{5993B091-57A9-1F97-F1FA-83807FF5DB4D}"/>
               </a:ext>
             </a:extLst>
           </p:cNvPr>
@@ -5564,7 +5626,7 @@
             <a:hlinkClick r:id="" action="ppaction://media"/>
             <a:extLst>
               <a:ext uri="{FF2B5EF4-FFF2-40B4-BE49-F238E27FC236}">
-                <a16:creationId xmlns:a16="http://schemas.microsoft.com/office/drawing/2014/main" id="{361A24E2-9194-DD77-A0B0-1ECA014CDB18}"/>
+                <a16:creationId xmlns:a16="http://schemas.microsoft.com/office/drawing/2014/main" id="{B94ACE8E-AC20-453E-6F94-0B18C25B1B08}"/>
               </a:ext>
             </a:extLst>
           </p:cNvPr>
@@ -5599,7 +5661,7 @@
     </p:spTree>
     <p:extLst>
       <p:ext uri="{BB962C8B-B14F-4D97-AF65-F5344CB8AC3E}">
-        <p14:creationId xmlns:p14="http://schemas.microsoft.com/office/powerpoint/2010/main" val="4114965026"/>
+        <p14:creationId xmlns:p14="http://schemas.microsoft.com/office/powerpoint/2010/main" val="2402723378"/>
       </p:ext>
     </p:extLst>
   </p:cSld>

--- a/public/videos/repositories/miseoshi-app/miseoshi-app-tech-preview.pptx
+++ b/public/videos/repositories/miseoshi-app/miseoshi-app-tech-preview.pptx
@@ -134,7 +134,7 @@
           <p:cNvPr id="2" name="タイトル 1">
             <a:extLst>
               <a:ext uri="{FF2B5EF4-FFF2-40B4-BE49-F238E27FC236}">
-                <a16:creationId xmlns:a16="http://schemas.microsoft.com/office/drawing/2014/main" id="{5279AC82-09B8-506F-3343-3B6671410075}"/>
+                <a16:creationId xmlns:a16="http://schemas.microsoft.com/office/drawing/2014/main" id="{9A9067BC-959E-F991-0694-9C8286C368F5}"/>
               </a:ext>
             </a:extLst>
           </p:cNvPr>
@@ -171,7 +171,7 @@
           <p:cNvPr id="3" name="字幕 2">
             <a:extLst>
               <a:ext uri="{FF2B5EF4-FFF2-40B4-BE49-F238E27FC236}">
-                <a16:creationId xmlns:a16="http://schemas.microsoft.com/office/drawing/2014/main" id="{8AB60ADA-80E6-C634-1DB1-C6D221683544}"/>
+                <a16:creationId xmlns:a16="http://schemas.microsoft.com/office/drawing/2014/main" id="{69C3407D-E69F-DC19-E7B6-F28277DE02AE}"/>
               </a:ext>
             </a:extLst>
           </p:cNvPr>
@@ -241,7 +241,7 @@
           <p:cNvPr id="4" name="日付プレースホルダー 3">
             <a:extLst>
               <a:ext uri="{FF2B5EF4-FFF2-40B4-BE49-F238E27FC236}">
-                <a16:creationId xmlns:a16="http://schemas.microsoft.com/office/drawing/2014/main" id="{03688510-AA52-8C11-9CC9-730AC480D66C}"/>
+                <a16:creationId xmlns:a16="http://schemas.microsoft.com/office/drawing/2014/main" id="{CD8C463E-6A88-819D-2C28-35A33A7904D1}"/>
               </a:ext>
             </a:extLst>
           </p:cNvPr>
@@ -257,7 +257,7 @@
           <a:bodyPr/>
           <a:lstStyle/>
           <a:p>
-            <a:fld id="{613F318F-0286-42A3-B4C5-AF963E0EF8C7}" type="datetimeFigureOut">
+            <a:fld id="{3C74B534-BFFE-470C-9B0C-27419DE961B1}" type="datetimeFigureOut">
               <a:rPr kumimoji="1" lang="ja-JP" altLang="en-US" smtClean="0"/>
               <a:t>2026/7/30</a:t>
             </a:fld>
@@ -270,7 +270,7 @@
           <p:cNvPr id="5" name="フッター プレースホルダー 4">
             <a:extLst>
               <a:ext uri="{FF2B5EF4-FFF2-40B4-BE49-F238E27FC236}">
-                <a16:creationId xmlns:a16="http://schemas.microsoft.com/office/drawing/2014/main" id="{81452211-6431-F4B0-A32C-3F0B20CC475A}"/>
+                <a16:creationId xmlns:a16="http://schemas.microsoft.com/office/drawing/2014/main" id="{A4A8C9D0-E287-A188-43C3-938E2D87FBA6}"/>
               </a:ext>
             </a:extLst>
           </p:cNvPr>
@@ -295,7 +295,7 @@
           <p:cNvPr id="6" name="スライド番号プレースホルダー 5">
             <a:extLst>
               <a:ext uri="{FF2B5EF4-FFF2-40B4-BE49-F238E27FC236}">
-                <a16:creationId xmlns:a16="http://schemas.microsoft.com/office/drawing/2014/main" id="{AFCE458A-70F3-763C-DB02-C8F1C85ACC0A}"/>
+                <a16:creationId xmlns:a16="http://schemas.microsoft.com/office/drawing/2014/main" id="{3A8C3AA9-7FED-C399-273E-44FB6517674F}"/>
               </a:ext>
             </a:extLst>
           </p:cNvPr>
@@ -311,7 +311,7 @@
           <a:bodyPr/>
           <a:lstStyle/>
           <a:p>
-            <a:fld id="{CF235A59-D3CA-4A18-84D9-4CB90E6C5DC8}" type="slidenum">
+            <a:fld id="{94DB0818-224C-4B82-94AC-1BF6F60DC6CA}" type="slidenum">
               <a:rPr kumimoji="1" lang="ja-JP" altLang="en-US" smtClean="0"/>
               <a:t>‹#›</a:t>
             </a:fld>
@@ -322,7 +322,7 @@
     </p:spTree>
     <p:extLst>
       <p:ext uri="{BB962C8B-B14F-4D97-AF65-F5344CB8AC3E}">
-        <p14:creationId xmlns:p14="http://schemas.microsoft.com/office/powerpoint/2010/main" val="3819897067"/>
+        <p14:creationId xmlns:p14="http://schemas.microsoft.com/office/powerpoint/2010/main" val="2331982071"/>
       </p:ext>
     </p:extLst>
   </p:cSld>
@@ -354,7 +354,7 @@
           <p:cNvPr id="2" name="タイトル 1">
             <a:extLst>
               <a:ext uri="{FF2B5EF4-FFF2-40B4-BE49-F238E27FC236}">
-                <a16:creationId xmlns:a16="http://schemas.microsoft.com/office/drawing/2014/main" id="{30C2F019-8C0E-12F8-CD0B-06CEA390DE75}"/>
+                <a16:creationId xmlns:a16="http://schemas.microsoft.com/office/drawing/2014/main" id="{906B2A4F-ECA6-2D22-B8E7-999F7EC9CB7C}"/>
               </a:ext>
             </a:extLst>
           </p:cNvPr>
@@ -382,7 +382,7 @@
           <p:cNvPr id="3" name="縦書きテキスト プレースホルダー 2">
             <a:extLst>
               <a:ext uri="{FF2B5EF4-FFF2-40B4-BE49-F238E27FC236}">
-                <a16:creationId xmlns:a16="http://schemas.microsoft.com/office/drawing/2014/main" id="{A991CA6B-795E-3407-6FCA-42151FCE442A}"/>
+                <a16:creationId xmlns:a16="http://schemas.microsoft.com/office/drawing/2014/main" id="{5290D4FF-9F1A-BDBE-5988-B683ABB0F8F1}"/>
               </a:ext>
             </a:extLst>
           </p:cNvPr>
@@ -471,7 +471,7 @@
           <p:cNvPr id="4" name="日付プレースホルダー 3">
             <a:extLst>
               <a:ext uri="{FF2B5EF4-FFF2-40B4-BE49-F238E27FC236}">
-                <a16:creationId xmlns:a16="http://schemas.microsoft.com/office/drawing/2014/main" id="{0D740541-766E-878D-0592-692F9776D20E}"/>
+                <a16:creationId xmlns:a16="http://schemas.microsoft.com/office/drawing/2014/main" id="{C2BC8CFF-2479-F29A-D7CE-D9F47827A937}"/>
               </a:ext>
             </a:extLst>
           </p:cNvPr>
@@ -487,7 +487,7 @@
           <a:bodyPr/>
           <a:lstStyle/>
           <a:p>
-            <a:fld id="{613F318F-0286-42A3-B4C5-AF963E0EF8C7}" type="datetimeFigureOut">
+            <a:fld id="{3C74B534-BFFE-470C-9B0C-27419DE961B1}" type="datetimeFigureOut">
               <a:rPr kumimoji="1" lang="ja-JP" altLang="en-US" smtClean="0"/>
               <a:t>2026/7/30</a:t>
             </a:fld>
@@ -500,7 +500,7 @@
           <p:cNvPr id="5" name="フッター プレースホルダー 4">
             <a:extLst>
               <a:ext uri="{FF2B5EF4-FFF2-40B4-BE49-F238E27FC236}">
-                <a16:creationId xmlns:a16="http://schemas.microsoft.com/office/drawing/2014/main" id="{489569B1-F3B8-766C-BED6-34CB6F29EA6D}"/>
+                <a16:creationId xmlns:a16="http://schemas.microsoft.com/office/drawing/2014/main" id="{ECFF5F77-5B62-9C17-BA12-9D2E30272CCC}"/>
               </a:ext>
             </a:extLst>
           </p:cNvPr>
@@ -525,7 +525,7 @@
           <p:cNvPr id="6" name="スライド番号プレースホルダー 5">
             <a:extLst>
               <a:ext uri="{FF2B5EF4-FFF2-40B4-BE49-F238E27FC236}">
-                <a16:creationId xmlns:a16="http://schemas.microsoft.com/office/drawing/2014/main" id="{80824FDF-3D27-CBBD-C011-AD3691C5A5F8}"/>
+                <a16:creationId xmlns:a16="http://schemas.microsoft.com/office/drawing/2014/main" id="{26CC6FFC-D3C8-1A15-7456-975B3FBA42B6}"/>
               </a:ext>
             </a:extLst>
           </p:cNvPr>
@@ -541,7 +541,7 @@
           <a:bodyPr/>
           <a:lstStyle/>
           <a:p>
-            <a:fld id="{CF235A59-D3CA-4A18-84D9-4CB90E6C5DC8}" type="slidenum">
+            <a:fld id="{94DB0818-224C-4B82-94AC-1BF6F60DC6CA}" type="slidenum">
               <a:rPr kumimoji="1" lang="ja-JP" altLang="en-US" smtClean="0"/>
               <a:t>‹#›</a:t>
             </a:fld>
@@ -552,7 +552,7 @@
     </p:spTree>
     <p:extLst>
       <p:ext uri="{BB962C8B-B14F-4D97-AF65-F5344CB8AC3E}">
-        <p14:creationId xmlns:p14="http://schemas.microsoft.com/office/powerpoint/2010/main" val="539925351"/>
+        <p14:creationId xmlns:p14="http://schemas.microsoft.com/office/powerpoint/2010/main" val="925308379"/>
       </p:ext>
     </p:extLst>
   </p:cSld>
@@ -584,7 +584,7 @@
           <p:cNvPr id="2" name="縦書きタイトル 1">
             <a:extLst>
               <a:ext uri="{FF2B5EF4-FFF2-40B4-BE49-F238E27FC236}">
-                <a16:creationId xmlns:a16="http://schemas.microsoft.com/office/drawing/2014/main" id="{7B2B8DDA-4BED-43D6-AAF8-540565248944}"/>
+                <a16:creationId xmlns:a16="http://schemas.microsoft.com/office/drawing/2014/main" id="{838C4A40-6607-30BE-ADEB-1D6D7835970A}"/>
               </a:ext>
             </a:extLst>
           </p:cNvPr>
@@ -617,7 +617,7 @@
           <p:cNvPr id="3" name="縦書きテキスト プレースホルダー 2">
             <a:extLst>
               <a:ext uri="{FF2B5EF4-FFF2-40B4-BE49-F238E27FC236}">
-                <a16:creationId xmlns:a16="http://schemas.microsoft.com/office/drawing/2014/main" id="{EE98039E-4870-7137-4F16-3C0FA21B10B0}"/>
+                <a16:creationId xmlns:a16="http://schemas.microsoft.com/office/drawing/2014/main" id="{19B9823D-9CF6-37B1-09C6-B82CDB9BA05A}"/>
               </a:ext>
             </a:extLst>
           </p:cNvPr>
@@ -711,7 +711,7 @@
           <p:cNvPr id="4" name="日付プレースホルダー 3">
             <a:extLst>
               <a:ext uri="{FF2B5EF4-FFF2-40B4-BE49-F238E27FC236}">
-                <a16:creationId xmlns:a16="http://schemas.microsoft.com/office/drawing/2014/main" id="{758B0F92-646F-2FA1-1F68-DF6C71DD12EB}"/>
+                <a16:creationId xmlns:a16="http://schemas.microsoft.com/office/drawing/2014/main" id="{B99A94EB-6318-CE47-6CD8-AC934B3F159E}"/>
               </a:ext>
             </a:extLst>
           </p:cNvPr>
@@ -727,7 +727,7 @@
           <a:bodyPr/>
           <a:lstStyle/>
           <a:p>
-            <a:fld id="{613F318F-0286-42A3-B4C5-AF963E0EF8C7}" type="datetimeFigureOut">
+            <a:fld id="{3C74B534-BFFE-470C-9B0C-27419DE961B1}" type="datetimeFigureOut">
               <a:rPr kumimoji="1" lang="ja-JP" altLang="en-US" smtClean="0"/>
               <a:t>2026/7/30</a:t>
             </a:fld>
@@ -740,7 +740,7 @@
           <p:cNvPr id="5" name="フッター プレースホルダー 4">
             <a:extLst>
               <a:ext uri="{FF2B5EF4-FFF2-40B4-BE49-F238E27FC236}">
-                <a16:creationId xmlns:a16="http://schemas.microsoft.com/office/drawing/2014/main" id="{FABCDDE8-AE4E-6509-D662-AAED9BA47107}"/>
+                <a16:creationId xmlns:a16="http://schemas.microsoft.com/office/drawing/2014/main" id="{E39E8B09-788E-E5DB-D22A-F6AE0E5741E3}"/>
               </a:ext>
             </a:extLst>
           </p:cNvPr>
@@ -765,7 +765,7 @@
           <p:cNvPr id="6" name="スライド番号プレースホルダー 5">
             <a:extLst>
               <a:ext uri="{FF2B5EF4-FFF2-40B4-BE49-F238E27FC236}">
-                <a16:creationId xmlns:a16="http://schemas.microsoft.com/office/drawing/2014/main" id="{EE02B111-2BA4-A979-9E41-9B12D9F599BA}"/>
+                <a16:creationId xmlns:a16="http://schemas.microsoft.com/office/drawing/2014/main" id="{2CC7D27A-04DA-D74F-1EF5-225D0F36E678}"/>
               </a:ext>
             </a:extLst>
           </p:cNvPr>
@@ -781,7 +781,7 @@
           <a:bodyPr/>
           <a:lstStyle/>
           <a:p>
-            <a:fld id="{CF235A59-D3CA-4A18-84D9-4CB90E6C5DC8}" type="slidenum">
+            <a:fld id="{94DB0818-224C-4B82-94AC-1BF6F60DC6CA}" type="slidenum">
               <a:rPr kumimoji="1" lang="ja-JP" altLang="en-US" smtClean="0"/>
               <a:t>‹#›</a:t>
             </a:fld>
@@ -792,7 +792,7 @@
     </p:spTree>
     <p:extLst>
       <p:ext uri="{BB962C8B-B14F-4D97-AF65-F5344CB8AC3E}">
-        <p14:creationId xmlns:p14="http://schemas.microsoft.com/office/powerpoint/2010/main" val="146814037"/>
+        <p14:creationId xmlns:p14="http://schemas.microsoft.com/office/powerpoint/2010/main" val="1964843247"/>
       </p:ext>
     </p:extLst>
   </p:cSld>
@@ -824,7 +824,7 @@
           <p:cNvPr id="2" name="タイトル 1">
             <a:extLst>
               <a:ext uri="{FF2B5EF4-FFF2-40B4-BE49-F238E27FC236}">
-                <a16:creationId xmlns:a16="http://schemas.microsoft.com/office/drawing/2014/main" id="{4BEC8C9A-78FF-2FCD-3BB8-B67CB1C9B0D5}"/>
+                <a16:creationId xmlns:a16="http://schemas.microsoft.com/office/drawing/2014/main" id="{7F0048D9-14A4-96CD-48FB-F62518AC6040}"/>
               </a:ext>
             </a:extLst>
           </p:cNvPr>
@@ -852,7 +852,7 @@
           <p:cNvPr id="3" name="コンテンツ プレースホルダー 2">
             <a:extLst>
               <a:ext uri="{FF2B5EF4-FFF2-40B4-BE49-F238E27FC236}">
-                <a16:creationId xmlns:a16="http://schemas.microsoft.com/office/drawing/2014/main" id="{A04E0F7F-E2EF-D117-D38A-F7C661D95C21}"/>
+                <a16:creationId xmlns:a16="http://schemas.microsoft.com/office/drawing/2014/main" id="{4F2F31FE-5A51-314A-59FE-8FF04A8A4DC7}"/>
               </a:ext>
             </a:extLst>
           </p:cNvPr>
@@ -941,7 +941,7 @@
           <p:cNvPr id="4" name="日付プレースホルダー 3">
             <a:extLst>
               <a:ext uri="{FF2B5EF4-FFF2-40B4-BE49-F238E27FC236}">
-                <a16:creationId xmlns:a16="http://schemas.microsoft.com/office/drawing/2014/main" id="{FF23CC02-0E19-C2CB-4875-0A05A0664E5D}"/>
+                <a16:creationId xmlns:a16="http://schemas.microsoft.com/office/drawing/2014/main" id="{6FE914DB-14A7-560F-7AC9-0D62F56DDAEE}"/>
               </a:ext>
             </a:extLst>
           </p:cNvPr>
@@ -957,7 +957,7 @@
           <a:bodyPr/>
           <a:lstStyle/>
           <a:p>
-            <a:fld id="{613F318F-0286-42A3-B4C5-AF963E0EF8C7}" type="datetimeFigureOut">
+            <a:fld id="{3C74B534-BFFE-470C-9B0C-27419DE961B1}" type="datetimeFigureOut">
               <a:rPr kumimoji="1" lang="ja-JP" altLang="en-US" smtClean="0"/>
               <a:t>2026/7/30</a:t>
             </a:fld>
@@ -970,7 +970,7 @@
           <p:cNvPr id="5" name="フッター プレースホルダー 4">
             <a:extLst>
               <a:ext uri="{FF2B5EF4-FFF2-40B4-BE49-F238E27FC236}">
-                <a16:creationId xmlns:a16="http://schemas.microsoft.com/office/drawing/2014/main" id="{18884685-0D7D-E985-766D-595DB76BE6C1}"/>
+                <a16:creationId xmlns:a16="http://schemas.microsoft.com/office/drawing/2014/main" id="{E38FB38B-CED2-53A0-6537-2D8F58EC3D17}"/>
               </a:ext>
             </a:extLst>
           </p:cNvPr>
@@ -995,7 +995,7 @@
           <p:cNvPr id="6" name="スライド番号プレースホルダー 5">
             <a:extLst>
               <a:ext uri="{FF2B5EF4-FFF2-40B4-BE49-F238E27FC236}">
-                <a16:creationId xmlns:a16="http://schemas.microsoft.com/office/drawing/2014/main" id="{E338F898-3EA9-B449-EBF5-6CCE3ADC81C5}"/>
+                <a16:creationId xmlns:a16="http://schemas.microsoft.com/office/drawing/2014/main" id="{1F5FBA5D-364A-AECA-87D9-AA4E2CE479EF}"/>
               </a:ext>
             </a:extLst>
           </p:cNvPr>
@@ -1011,7 +1011,7 @@
           <a:bodyPr/>
           <a:lstStyle/>
           <a:p>
-            <a:fld id="{CF235A59-D3CA-4A18-84D9-4CB90E6C5DC8}" type="slidenum">
+            <a:fld id="{94DB0818-224C-4B82-94AC-1BF6F60DC6CA}" type="slidenum">
               <a:rPr kumimoji="1" lang="ja-JP" altLang="en-US" smtClean="0"/>
               <a:t>‹#›</a:t>
             </a:fld>
@@ -1022,7 +1022,7 @@
     </p:spTree>
     <p:extLst>
       <p:ext uri="{BB962C8B-B14F-4D97-AF65-F5344CB8AC3E}">
-        <p14:creationId xmlns:p14="http://schemas.microsoft.com/office/powerpoint/2010/main" val="430382836"/>
+        <p14:creationId xmlns:p14="http://schemas.microsoft.com/office/powerpoint/2010/main" val="2501850133"/>
       </p:ext>
     </p:extLst>
   </p:cSld>
@@ -1054,7 +1054,7 @@
           <p:cNvPr id="2" name="タイトル 1">
             <a:extLst>
               <a:ext uri="{FF2B5EF4-FFF2-40B4-BE49-F238E27FC236}">
-                <a16:creationId xmlns:a16="http://schemas.microsoft.com/office/drawing/2014/main" id="{3F6FCD91-369D-6E2E-0925-F9EBC11622DB}"/>
+                <a16:creationId xmlns:a16="http://schemas.microsoft.com/office/drawing/2014/main" id="{876AAA45-D909-692D-3314-8FC80D591802}"/>
               </a:ext>
             </a:extLst>
           </p:cNvPr>
@@ -1091,7 +1091,7 @@
           <p:cNvPr id="3" name="テキスト プレースホルダー 2">
             <a:extLst>
               <a:ext uri="{FF2B5EF4-FFF2-40B4-BE49-F238E27FC236}">
-                <a16:creationId xmlns:a16="http://schemas.microsoft.com/office/drawing/2014/main" id="{DD64FD38-3064-DE6E-FE28-0737D5E987A1}"/>
+                <a16:creationId xmlns:a16="http://schemas.microsoft.com/office/drawing/2014/main" id="{C0D2E229-2761-2F42-2C14-F933A43DD7DA}"/>
               </a:ext>
             </a:extLst>
           </p:cNvPr>
@@ -1216,7 +1216,7 @@
           <p:cNvPr id="4" name="日付プレースホルダー 3">
             <a:extLst>
               <a:ext uri="{FF2B5EF4-FFF2-40B4-BE49-F238E27FC236}">
-                <a16:creationId xmlns:a16="http://schemas.microsoft.com/office/drawing/2014/main" id="{53300AF7-09FD-2BFF-F5D6-2FC090918D66}"/>
+                <a16:creationId xmlns:a16="http://schemas.microsoft.com/office/drawing/2014/main" id="{92107BA3-D88E-ED30-4A95-C517863F9FF1}"/>
               </a:ext>
             </a:extLst>
           </p:cNvPr>
@@ -1232,7 +1232,7 @@
           <a:bodyPr/>
           <a:lstStyle/>
           <a:p>
-            <a:fld id="{613F318F-0286-42A3-B4C5-AF963E0EF8C7}" type="datetimeFigureOut">
+            <a:fld id="{3C74B534-BFFE-470C-9B0C-27419DE961B1}" type="datetimeFigureOut">
               <a:rPr kumimoji="1" lang="ja-JP" altLang="en-US" smtClean="0"/>
               <a:t>2026/7/30</a:t>
             </a:fld>
@@ -1245,7 +1245,7 @@
           <p:cNvPr id="5" name="フッター プレースホルダー 4">
             <a:extLst>
               <a:ext uri="{FF2B5EF4-FFF2-40B4-BE49-F238E27FC236}">
-                <a16:creationId xmlns:a16="http://schemas.microsoft.com/office/drawing/2014/main" id="{292C972C-E0A2-9E9D-DF53-595EE9DC6281}"/>
+                <a16:creationId xmlns:a16="http://schemas.microsoft.com/office/drawing/2014/main" id="{F695AD15-229B-2375-B9B1-E5CC15BDB207}"/>
               </a:ext>
             </a:extLst>
           </p:cNvPr>
@@ -1270,7 +1270,7 @@
           <p:cNvPr id="6" name="スライド番号プレースホルダー 5">
             <a:extLst>
               <a:ext uri="{FF2B5EF4-FFF2-40B4-BE49-F238E27FC236}">
-                <a16:creationId xmlns:a16="http://schemas.microsoft.com/office/drawing/2014/main" id="{DB2BCA97-F894-2332-EAC2-085AC2B98687}"/>
+                <a16:creationId xmlns:a16="http://schemas.microsoft.com/office/drawing/2014/main" id="{4D9B1EC3-D26A-14B8-87F3-B96627C0B98A}"/>
               </a:ext>
             </a:extLst>
           </p:cNvPr>
@@ -1286,7 +1286,7 @@
           <a:bodyPr/>
           <a:lstStyle/>
           <a:p>
-            <a:fld id="{CF235A59-D3CA-4A18-84D9-4CB90E6C5DC8}" type="slidenum">
+            <a:fld id="{94DB0818-224C-4B82-94AC-1BF6F60DC6CA}" type="slidenum">
               <a:rPr kumimoji="1" lang="ja-JP" altLang="en-US" smtClean="0"/>
               <a:t>‹#›</a:t>
             </a:fld>
@@ -1297,7 +1297,7 @@
     </p:spTree>
     <p:extLst>
       <p:ext uri="{BB962C8B-B14F-4D97-AF65-F5344CB8AC3E}">
-        <p14:creationId xmlns:p14="http://schemas.microsoft.com/office/powerpoint/2010/main" val="465846348"/>
+        <p14:creationId xmlns:p14="http://schemas.microsoft.com/office/powerpoint/2010/main" val="3075619171"/>
       </p:ext>
     </p:extLst>
   </p:cSld>
@@ -1329,7 +1329,7 @@
           <p:cNvPr id="2" name="タイトル 1">
             <a:extLst>
               <a:ext uri="{FF2B5EF4-FFF2-40B4-BE49-F238E27FC236}">
-                <a16:creationId xmlns:a16="http://schemas.microsoft.com/office/drawing/2014/main" id="{512CBCDE-D8C3-0D3E-0FA4-69D3CDCAC94C}"/>
+                <a16:creationId xmlns:a16="http://schemas.microsoft.com/office/drawing/2014/main" id="{9C3A31AF-AC53-344A-5498-8C33E069B3C8}"/>
               </a:ext>
             </a:extLst>
           </p:cNvPr>
@@ -1357,7 +1357,7 @@
           <p:cNvPr id="3" name="コンテンツ プレースホルダー 2">
             <a:extLst>
               <a:ext uri="{FF2B5EF4-FFF2-40B4-BE49-F238E27FC236}">
-                <a16:creationId xmlns:a16="http://schemas.microsoft.com/office/drawing/2014/main" id="{EDA3406F-E979-8E3E-27BA-1B64F8D1B932}"/>
+                <a16:creationId xmlns:a16="http://schemas.microsoft.com/office/drawing/2014/main" id="{0704D432-DBB3-51D9-2B53-9FC6A8B59ACC}"/>
               </a:ext>
             </a:extLst>
           </p:cNvPr>
@@ -1451,7 +1451,7 @@
           <p:cNvPr id="4" name="コンテンツ プレースホルダー 3">
             <a:extLst>
               <a:ext uri="{FF2B5EF4-FFF2-40B4-BE49-F238E27FC236}">
-                <a16:creationId xmlns:a16="http://schemas.microsoft.com/office/drawing/2014/main" id="{66416741-4F37-5DE8-2206-31B70A8BD5B3}"/>
+                <a16:creationId xmlns:a16="http://schemas.microsoft.com/office/drawing/2014/main" id="{DADD5B0F-76D7-1E0C-F2ED-74A47CF22468}"/>
               </a:ext>
             </a:extLst>
           </p:cNvPr>
@@ -1545,7 +1545,7 @@
           <p:cNvPr id="5" name="日付プレースホルダー 4">
             <a:extLst>
               <a:ext uri="{FF2B5EF4-FFF2-40B4-BE49-F238E27FC236}">
-                <a16:creationId xmlns:a16="http://schemas.microsoft.com/office/drawing/2014/main" id="{1FE4A958-5FB1-1B24-CE2B-9DE9395635A9}"/>
+                <a16:creationId xmlns:a16="http://schemas.microsoft.com/office/drawing/2014/main" id="{93B782F7-28D2-E0BC-371E-F8DF0148DB0D}"/>
               </a:ext>
             </a:extLst>
           </p:cNvPr>
@@ -1561,7 +1561,7 @@
           <a:bodyPr/>
           <a:lstStyle/>
           <a:p>
-            <a:fld id="{613F318F-0286-42A3-B4C5-AF963E0EF8C7}" type="datetimeFigureOut">
+            <a:fld id="{3C74B534-BFFE-470C-9B0C-27419DE961B1}" type="datetimeFigureOut">
               <a:rPr kumimoji="1" lang="ja-JP" altLang="en-US" smtClean="0"/>
               <a:t>2026/7/30</a:t>
             </a:fld>
@@ -1574,7 +1574,7 @@
           <p:cNvPr id="6" name="フッター プレースホルダー 5">
             <a:extLst>
               <a:ext uri="{FF2B5EF4-FFF2-40B4-BE49-F238E27FC236}">
-                <a16:creationId xmlns:a16="http://schemas.microsoft.com/office/drawing/2014/main" id="{5A9938ED-705E-8571-7594-E05700101A54}"/>
+                <a16:creationId xmlns:a16="http://schemas.microsoft.com/office/drawing/2014/main" id="{B40AB464-A512-8956-544A-DF3E43136F1F}"/>
               </a:ext>
             </a:extLst>
           </p:cNvPr>
@@ -1599,7 +1599,7 @@
           <p:cNvPr id="7" name="スライド番号プレースホルダー 6">
             <a:extLst>
               <a:ext uri="{FF2B5EF4-FFF2-40B4-BE49-F238E27FC236}">
-                <a16:creationId xmlns:a16="http://schemas.microsoft.com/office/drawing/2014/main" id="{23459169-91B5-7683-6178-66D7E4633B7C}"/>
+                <a16:creationId xmlns:a16="http://schemas.microsoft.com/office/drawing/2014/main" id="{8D5C5040-F802-46ED-9B67-7D52B98E16F0}"/>
               </a:ext>
             </a:extLst>
           </p:cNvPr>
@@ -1615,7 +1615,7 @@
           <a:bodyPr/>
           <a:lstStyle/>
           <a:p>
-            <a:fld id="{CF235A59-D3CA-4A18-84D9-4CB90E6C5DC8}" type="slidenum">
+            <a:fld id="{94DB0818-224C-4B82-94AC-1BF6F60DC6CA}" type="slidenum">
               <a:rPr kumimoji="1" lang="ja-JP" altLang="en-US" smtClean="0"/>
               <a:t>‹#›</a:t>
             </a:fld>
@@ -1626,7 +1626,7 @@
     </p:spTree>
     <p:extLst>
       <p:ext uri="{BB962C8B-B14F-4D97-AF65-F5344CB8AC3E}">
-        <p14:creationId xmlns:p14="http://schemas.microsoft.com/office/powerpoint/2010/main" val="1465662302"/>
+        <p14:creationId xmlns:p14="http://schemas.microsoft.com/office/powerpoint/2010/main" val="211178225"/>
       </p:ext>
     </p:extLst>
   </p:cSld>
@@ -1658,7 +1658,7 @@
           <p:cNvPr id="2" name="タイトル 1">
             <a:extLst>
               <a:ext uri="{FF2B5EF4-FFF2-40B4-BE49-F238E27FC236}">
-                <a16:creationId xmlns:a16="http://schemas.microsoft.com/office/drawing/2014/main" id="{EC18BA31-B84B-D34A-B33F-CAD688E35561}"/>
+                <a16:creationId xmlns:a16="http://schemas.microsoft.com/office/drawing/2014/main" id="{EE9BDD4F-2A87-CB98-EC84-E97EBDC53A25}"/>
               </a:ext>
             </a:extLst>
           </p:cNvPr>
@@ -1691,7 +1691,7 @@
           <p:cNvPr id="3" name="テキスト プレースホルダー 2">
             <a:extLst>
               <a:ext uri="{FF2B5EF4-FFF2-40B4-BE49-F238E27FC236}">
-                <a16:creationId xmlns:a16="http://schemas.microsoft.com/office/drawing/2014/main" id="{C146DD6C-BAC0-DF30-2E81-9494C7A8A5AC}"/>
+                <a16:creationId xmlns:a16="http://schemas.microsoft.com/office/drawing/2014/main" id="{A4476D08-A5A6-D307-08A8-7C8ED7640B5D}"/>
               </a:ext>
             </a:extLst>
           </p:cNvPr>
@@ -1762,7 +1762,7 @@
           <p:cNvPr id="4" name="コンテンツ プレースホルダー 3">
             <a:extLst>
               <a:ext uri="{FF2B5EF4-FFF2-40B4-BE49-F238E27FC236}">
-                <a16:creationId xmlns:a16="http://schemas.microsoft.com/office/drawing/2014/main" id="{EBEF67DC-5F2E-5F57-0EFC-2499BA355FED}"/>
+                <a16:creationId xmlns:a16="http://schemas.microsoft.com/office/drawing/2014/main" id="{A5B086D6-E4DC-F0B0-3131-457F0ABFD331}"/>
               </a:ext>
             </a:extLst>
           </p:cNvPr>
@@ -1856,7 +1856,7 @@
           <p:cNvPr id="5" name="テキスト プレースホルダー 4">
             <a:extLst>
               <a:ext uri="{FF2B5EF4-FFF2-40B4-BE49-F238E27FC236}">
-                <a16:creationId xmlns:a16="http://schemas.microsoft.com/office/drawing/2014/main" id="{D315AF4D-D850-5DE0-DCF2-121D88E654C2}"/>
+                <a16:creationId xmlns:a16="http://schemas.microsoft.com/office/drawing/2014/main" id="{9C7F4326-940C-4942-20BB-3DC905130300}"/>
               </a:ext>
             </a:extLst>
           </p:cNvPr>
@@ -1927,7 +1927,7 @@
           <p:cNvPr id="6" name="コンテンツ プレースホルダー 5">
             <a:extLst>
               <a:ext uri="{FF2B5EF4-FFF2-40B4-BE49-F238E27FC236}">
-                <a16:creationId xmlns:a16="http://schemas.microsoft.com/office/drawing/2014/main" id="{6A51C1A1-0FCC-758F-ACAF-025408700AD6}"/>
+                <a16:creationId xmlns:a16="http://schemas.microsoft.com/office/drawing/2014/main" id="{8684F363-3387-CFCF-74C1-43B26A591624}"/>
               </a:ext>
             </a:extLst>
           </p:cNvPr>
@@ -2021,7 +2021,7 @@
           <p:cNvPr id="7" name="日付プレースホルダー 6">
             <a:extLst>
               <a:ext uri="{FF2B5EF4-FFF2-40B4-BE49-F238E27FC236}">
-                <a16:creationId xmlns:a16="http://schemas.microsoft.com/office/drawing/2014/main" id="{F684348C-DF28-EE85-6D8A-9D7E27032D7F}"/>
+                <a16:creationId xmlns:a16="http://schemas.microsoft.com/office/drawing/2014/main" id="{8A204385-CE9C-4955-B292-DA52932E6D16}"/>
               </a:ext>
             </a:extLst>
           </p:cNvPr>
@@ -2037,7 +2037,7 @@
           <a:bodyPr/>
           <a:lstStyle/>
           <a:p>
-            <a:fld id="{613F318F-0286-42A3-B4C5-AF963E0EF8C7}" type="datetimeFigureOut">
+            <a:fld id="{3C74B534-BFFE-470C-9B0C-27419DE961B1}" type="datetimeFigureOut">
               <a:rPr kumimoji="1" lang="ja-JP" altLang="en-US" smtClean="0"/>
               <a:t>2026/7/30</a:t>
             </a:fld>
@@ -2050,7 +2050,7 @@
           <p:cNvPr id="8" name="フッター プレースホルダー 7">
             <a:extLst>
               <a:ext uri="{FF2B5EF4-FFF2-40B4-BE49-F238E27FC236}">
-                <a16:creationId xmlns:a16="http://schemas.microsoft.com/office/drawing/2014/main" id="{B717FB9B-CAB7-3D3B-3F0B-70E4BD5D4320}"/>
+                <a16:creationId xmlns:a16="http://schemas.microsoft.com/office/drawing/2014/main" id="{0EE7ABDD-8809-979A-C1A2-BB7D739099A9}"/>
               </a:ext>
             </a:extLst>
           </p:cNvPr>
@@ -2075,7 +2075,7 @@
           <p:cNvPr id="9" name="スライド番号プレースホルダー 8">
             <a:extLst>
               <a:ext uri="{FF2B5EF4-FFF2-40B4-BE49-F238E27FC236}">
-                <a16:creationId xmlns:a16="http://schemas.microsoft.com/office/drawing/2014/main" id="{2C9D2092-737B-6220-4EA0-49DA3C61D86B}"/>
+                <a16:creationId xmlns:a16="http://schemas.microsoft.com/office/drawing/2014/main" id="{7D1B3C46-7F62-D9F5-2010-0023B7A81AFC}"/>
               </a:ext>
             </a:extLst>
           </p:cNvPr>
@@ -2091,7 +2091,7 @@
           <a:bodyPr/>
           <a:lstStyle/>
           <a:p>
-            <a:fld id="{CF235A59-D3CA-4A18-84D9-4CB90E6C5DC8}" type="slidenum">
+            <a:fld id="{94DB0818-224C-4B82-94AC-1BF6F60DC6CA}" type="slidenum">
               <a:rPr kumimoji="1" lang="ja-JP" altLang="en-US" smtClean="0"/>
               <a:t>‹#›</a:t>
             </a:fld>
@@ -2102,7 +2102,7 @@
     </p:spTree>
     <p:extLst>
       <p:ext uri="{BB962C8B-B14F-4D97-AF65-F5344CB8AC3E}">
-        <p14:creationId xmlns:p14="http://schemas.microsoft.com/office/powerpoint/2010/main" val="2517738729"/>
+        <p14:creationId xmlns:p14="http://schemas.microsoft.com/office/powerpoint/2010/main" val="3944843016"/>
       </p:ext>
     </p:extLst>
   </p:cSld>
@@ -2134,7 +2134,7 @@
           <p:cNvPr id="2" name="タイトル 1">
             <a:extLst>
               <a:ext uri="{FF2B5EF4-FFF2-40B4-BE49-F238E27FC236}">
-                <a16:creationId xmlns:a16="http://schemas.microsoft.com/office/drawing/2014/main" id="{64B44536-4BE8-24B1-3BA7-10B8F5DC2C55}"/>
+                <a16:creationId xmlns:a16="http://schemas.microsoft.com/office/drawing/2014/main" id="{56667A01-BB69-5968-B0C6-CBEC3E718BE7}"/>
               </a:ext>
             </a:extLst>
           </p:cNvPr>
@@ -2162,7 +2162,7 @@
           <p:cNvPr id="3" name="日付プレースホルダー 2">
             <a:extLst>
               <a:ext uri="{FF2B5EF4-FFF2-40B4-BE49-F238E27FC236}">
-                <a16:creationId xmlns:a16="http://schemas.microsoft.com/office/drawing/2014/main" id="{72002B5D-E187-6878-EB0B-4C339D162CDE}"/>
+                <a16:creationId xmlns:a16="http://schemas.microsoft.com/office/drawing/2014/main" id="{56CE0424-DAF2-076E-1135-DC50FE31790B}"/>
               </a:ext>
             </a:extLst>
           </p:cNvPr>
@@ -2178,7 +2178,7 @@
           <a:bodyPr/>
           <a:lstStyle/>
           <a:p>
-            <a:fld id="{613F318F-0286-42A3-B4C5-AF963E0EF8C7}" type="datetimeFigureOut">
+            <a:fld id="{3C74B534-BFFE-470C-9B0C-27419DE961B1}" type="datetimeFigureOut">
               <a:rPr kumimoji="1" lang="ja-JP" altLang="en-US" smtClean="0"/>
               <a:t>2026/7/30</a:t>
             </a:fld>
@@ -2191,7 +2191,7 @@
           <p:cNvPr id="4" name="フッター プレースホルダー 3">
             <a:extLst>
               <a:ext uri="{FF2B5EF4-FFF2-40B4-BE49-F238E27FC236}">
-                <a16:creationId xmlns:a16="http://schemas.microsoft.com/office/drawing/2014/main" id="{76848032-0547-0A3F-E0F0-08F761A3AEB3}"/>
+                <a16:creationId xmlns:a16="http://schemas.microsoft.com/office/drawing/2014/main" id="{3FE31172-7F4F-663A-7A35-49462F74A7BD}"/>
               </a:ext>
             </a:extLst>
           </p:cNvPr>
@@ -2216,7 +2216,7 @@
           <p:cNvPr id="5" name="スライド番号プレースホルダー 4">
             <a:extLst>
               <a:ext uri="{FF2B5EF4-FFF2-40B4-BE49-F238E27FC236}">
-                <a16:creationId xmlns:a16="http://schemas.microsoft.com/office/drawing/2014/main" id="{C76CEF19-50C4-0879-2B96-9C076C404B42}"/>
+                <a16:creationId xmlns:a16="http://schemas.microsoft.com/office/drawing/2014/main" id="{06D0C027-9E84-8FC4-37BC-E48BD2F04444}"/>
               </a:ext>
             </a:extLst>
           </p:cNvPr>
@@ -2232,7 +2232,7 @@
           <a:bodyPr/>
           <a:lstStyle/>
           <a:p>
-            <a:fld id="{CF235A59-D3CA-4A18-84D9-4CB90E6C5DC8}" type="slidenum">
+            <a:fld id="{94DB0818-224C-4B82-94AC-1BF6F60DC6CA}" type="slidenum">
               <a:rPr kumimoji="1" lang="ja-JP" altLang="en-US" smtClean="0"/>
               <a:t>‹#›</a:t>
             </a:fld>
@@ -2243,7 +2243,7 @@
     </p:spTree>
     <p:extLst>
       <p:ext uri="{BB962C8B-B14F-4D97-AF65-F5344CB8AC3E}">
-        <p14:creationId xmlns:p14="http://schemas.microsoft.com/office/powerpoint/2010/main" val="3515920160"/>
+        <p14:creationId xmlns:p14="http://schemas.microsoft.com/office/powerpoint/2010/main" val="1502917490"/>
       </p:ext>
     </p:extLst>
   </p:cSld>
@@ -2275,7 +2275,7 @@
           <p:cNvPr id="2" name="日付プレースホルダー 1">
             <a:extLst>
               <a:ext uri="{FF2B5EF4-FFF2-40B4-BE49-F238E27FC236}">
-                <a16:creationId xmlns:a16="http://schemas.microsoft.com/office/drawing/2014/main" id="{B49BEF0D-6433-2BBD-3337-079EF0B2B717}"/>
+                <a16:creationId xmlns:a16="http://schemas.microsoft.com/office/drawing/2014/main" id="{02A33196-B6A2-0DB8-72CB-F3B0BE7E9653}"/>
               </a:ext>
             </a:extLst>
           </p:cNvPr>
@@ -2291,7 +2291,7 @@
           <a:bodyPr/>
           <a:lstStyle/>
           <a:p>
-            <a:fld id="{613F318F-0286-42A3-B4C5-AF963E0EF8C7}" type="datetimeFigureOut">
+            <a:fld id="{3C74B534-BFFE-470C-9B0C-27419DE961B1}" type="datetimeFigureOut">
               <a:rPr kumimoji="1" lang="ja-JP" altLang="en-US" smtClean="0"/>
               <a:t>2026/7/30</a:t>
             </a:fld>
@@ -2304,7 +2304,7 @@
           <p:cNvPr id="3" name="フッター プレースホルダー 2">
             <a:extLst>
               <a:ext uri="{FF2B5EF4-FFF2-40B4-BE49-F238E27FC236}">
-                <a16:creationId xmlns:a16="http://schemas.microsoft.com/office/drawing/2014/main" id="{27E2C272-F7F2-8FB3-C745-8E31058E870E}"/>
+                <a16:creationId xmlns:a16="http://schemas.microsoft.com/office/drawing/2014/main" id="{3E3225C0-645C-518B-FB8F-7AC4045AD1B0}"/>
               </a:ext>
             </a:extLst>
           </p:cNvPr>
@@ -2329,7 +2329,7 @@
           <p:cNvPr id="4" name="スライド番号プレースホルダー 3">
             <a:extLst>
               <a:ext uri="{FF2B5EF4-FFF2-40B4-BE49-F238E27FC236}">
-                <a16:creationId xmlns:a16="http://schemas.microsoft.com/office/drawing/2014/main" id="{1B4E7435-0ED7-84E7-A651-D9278DD7C213}"/>
+                <a16:creationId xmlns:a16="http://schemas.microsoft.com/office/drawing/2014/main" id="{F585BB77-5E0B-C133-18DA-E84A08BACCDB}"/>
               </a:ext>
             </a:extLst>
           </p:cNvPr>
@@ -2345,7 +2345,7 @@
           <a:bodyPr/>
           <a:lstStyle/>
           <a:p>
-            <a:fld id="{CF235A59-D3CA-4A18-84D9-4CB90E6C5DC8}" type="slidenum">
+            <a:fld id="{94DB0818-224C-4B82-94AC-1BF6F60DC6CA}" type="slidenum">
               <a:rPr kumimoji="1" lang="ja-JP" altLang="en-US" smtClean="0"/>
               <a:t>‹#›</a:t>
             </a:fld>
@@ -2356,7 +2356,7 @@
     </p:spTree>
     <p:extLst>
       <p:ext uri="{BB962C8B-B14F-4D97-AF65-F5344CB8AC3E}">
-        <p14:creationId xmlns:p14="http://schemas.microsoft.com/office/powerpoint/2010/main" val="2967596350"/>
+        <p14:creationId xmlns:p14="http://schemas.microsoft.com/office/powerpoint/2010/main" val="4219770879"/>
       </p:ext>
     </p:extLst>
   </p:cSld>
@@ -2388,7 +2388,7 @@
           <p:cNvPr id="2" name="タイトル 1">
             <a:extLst>
               <a:ext uri="{FF2B5EF4-FFF2-40B4-BE49-F238E27FC236}">
-                <a16:creationId xmlns:a16="http://schemas.microsoft.com/office/drawing/2014/main" id="{BB1443DA-750D-84BC-C342-DE5A7326D952}"/>
+                <a16:creationId xmlns:a16="http://schemas.microsoft.com/office/drawing/2014/main" id="{CE050398-BF80-613E-C992-AC005F0805E4}"/>
               </a:ext>
             </a:extLst>
           </p:cNvPr>
@@ -2425,7 +2425,7 @@
           <p:cNvPr id="3" name="コンテンツ プレースホルダー 2">
             <a:extLst>
               <a:ext uri="{FF2B5EF4-FFF2-40B4-BE49-F238E27FC236}">
-                <a16:creationId xmlns:a16="http://schemas.microsoft.com/office/drawing/2014/main" id="{A22B6B3D-A33D-EDEA-E18E-93AFB5B46CFD}"/>
+                <a16:creationId xmlns:a16="http://schemas.microsoft.com/office/drawing/2014/main" id="{D19DCEE9-A979-B2EC-36B0-97481B8392A2}"/>
               </a:ext>
             </a:extLst>
           </p:cNvPr>
@@ -2547,7 +2547,7 @@
           <p:cNvPr id="4" name="テキスト プレースホルダー 3">
             <a:extLst>
               <a:ext uri="{FF2B5EF4-FFF2-40B4-BE49-F238E27FC236}">
-                <a16:creationId xmlns:a16="http://schemas.microsoft.com/office/drawing/2014/main" id="{45DE7A9E-9E86-B821-5A1D-610DA8863759}"/>
+                <a16:creationId xmlns:a16="http://schemas.microsoft.com/office/drawing/2014/main" id="{7702F588-9143-8EE3-6B2E-DCAC3F81BEAE}"/>
               </a:ext>
             </a:extLst>
           </p:cNvPr>
@@ -2618,7 +2618,7 @@
           <p:cNvPr id="5" name="日付プレースホルダー 4">
             <a:extLst>
               <a:ext uri="{FF2B5EF4-FFF2-40B4-BE49-F238E27FC236}">
-                <a16:creationId xmlns:a16="http://schemas.microsoft.com/office/drawing/2014/main" id="{017D713D-C0C7-FF80-1E64-7BD812BF45B0}"/>
+                <a16:creationId xmlns:a16="http://schemas.microsoft.com/office/drawing/2014/main" id="{2DD0F1E7-E591-554F-321A-61F5C5113704}"/>
               </a:ext>
             </a:extLst>
           </p:cNvPr>
@@ -2634,7 +2634,7 @@
           <a:bodyPr/>
           <a:lstStyle/>
           <a:p>
-            <a:fld id="{613F318F-0286-42A3-B4C5-AF963E0EF8C7}" type="datetimeFigureOut">
+            <a:fld id="{3C74B534-BFFE-470C-9B0C-27419DE961B1}" type="datetimeFigureOut">
               <a:rPr kumimoji="1" lang="ja-JP" altLang="en-US" smtClean="0"/>
               <a:t>2026/7/30</a:t>
             </a:fld>
@@ -2647,7 +2647,7 @@
           <p:cNvPr id="6" name="フッター プレースホルダー 5">
             <a:extLst>
               <a:ext uri="{FF2B5EF4-FFF2-40B4-BE49-F238E27FC236}">
-                <a16:creationId xmlns:a16="http://schemas.microsoft.com/office/drawing/2014/main" id="{6E4D39A9-EBBB-BC16-C702-95D07E8DD666}"/>
+                <a16:creationId xmlns:a16="http://schemas.microsoft.com/office/drawing/2014/main" id="{44AC66AC-A35F-1F57-9411-DBE694E7E7B2}"/>
               </a:ext>
             </a:extLst>
           </p:cNvPr>
@@ -2672,7 +2672,7 @@
           <p:cNvPr id="7" name="スライド番号プレースホルダー 6">
             <a:extLst>
               <a:ext uri="{FF2B5EF4-FFF2-40B4-BE49-F238E27FC236}">
-                <a16:creationId xmlns:a16="http://schemas.microsoft.com/office/drawing/2014/main" id="{59684657-1CA3-DBBE-9DDF-9661A3E1FF53}"/>
+                <a16:creationId xmlns:a16="http://schemas.microsoft.com/office/drawing/2014/main" id="{9394FDCE-8C04-5420-5F60-96B506DF2089}"/>
               </a:ext>
             </a:extLst>
           </p:cNvPr>
@@ -2688,7 +2688,7 @@
           <a:bodyPr/>
           <a:lstStyle/>
           <a:p>
-            <a:fld id="{CF235A59-D3CA-4A18-84D9-4CB90E6C5DC8}" type="slidenum">
+            <a:fld id="{94DB0818-224C-4B82-94AC-1BF6F60DC6CA}" type="slidenum">
               <a:rPr kumimoji="1" lang="ja-JP" altLang="en-US" smtClean="0"/>
               <a:t>‹#›</a:t>
             </a:fld>
@@ -2699,7 +2699,7 @@
     </p:spTree>
     <p:extLst>
       <p:ext uri="{BB962C8B-B14F-4D97-AF65-F5344CB8AC3E}">
-        <p14:creationId xmlns:p14="http://schemas.microsoft.com/office/powerpoint/2010/main" val="824843522"/>
+        <p14:creationId xmlns:p14="http://schemas.microsoft.com/office/powerpoint/2010/main" val="1124829457"/>
       </p:ext>
     </p:extLst>
   </p:cSld>
@@ -2731,7 +2731,7 @@
           <p:cNvPr id="2" name="タイトル 1">
             <a:extLst>
               <a:ext uri="{FF2B5EF4-FFF2-40B4-BE49-F238E27FC236}">
-                <a16:creationId xmlns:a16="http://schemas.microsoft.com/office/drawing/2014/main" id="{5CA5D86A-DBDA-1C82-2E38-8BD83F8811FA}"/>
+                <a16:creationId xmlns:a16="http://schemas.microsoft.com/office/drawing/2014/main" id="{0BC00179-749D-AF3F-C017-1A0D858B2C30}"/>
               </a:ext>
             </a:extLst>
           </p:cNvPr>
@@ -2768,7 +2768,7 @@
           <p:cNvPr id="3" name="図プレースホルダー 2">
             <a:extLst>
               <a:ext uri="{FF2B5EF4-FFF2-40B4-BE49-F238E27FC236}">
-                <a16:creationId xmlns:a16="http://schemas.microsoft.com/office/drawing/2014/main" id="{7598302C-4B74-2D94-23EA-68EC88F6521E}"/>
+                <a16:creationId xmlns:a16="http://schemas.microsoft.com/office/drawing/2014/main" id="{6BE3B1E2-8236-DE14-B6F0-29FF6C268279}"/>
               </a:ext>
             </a:extLst>
           </p:cNvPr>
@@ -2835,7 +2835,7 @@
           <p:cNvPr id="4" name="テキスト プレースホルダー 3">
             <a:extLst>
               <a:ext uri="{FF2B5EF4-FFF2-40B4-BE49-F238E27FC236}">
-                <a16:creationId xmlns:a16="http://schemas.microsoft.com/office/drawing/2014/main" id="{AEAB30C3-5E44-48C8-CA2F-92A4CB5A4FA5}"/>
+                <a16:creationId xmlns:a16="http://schemas.microsoft.com/office/drawing/2014/main" id="{E7DE27A4-FE4D-3CAA-BD57-B1482B03CD37}"/>
               </a:ext>
             </a:extLst>
           </p:cNvPr>
@@ -2906,7 +2906,7 @@
           <p:cNvPr id="5" name="日付プレースホルダー 4">
             <a:extLst>
               <a:ext uri="{FF2B5EF4-FFF2-40B4-BE49-F238E27FC236}">
-                <a16:creationId xmlns:a16="http://schemas.microsoft.com/office/drawing/2014/main" id="{818C6893-DFDE-3711-BB49-0EDAF03A1A6E}"/>
+                <a16:creationId xmlns:a16="http://schemas.microsoft.com/office/drawing/2014/main" id="{5AB14479-9BF7-0F81-2769-C5D1832BD944}"/>
               </a:ext>
             </a:extLst>
           </p:cNvPr>
@@ -2922,7 +2922,7 @@
           <a:bodyPr/>
           <a:lstStyle/>
           <a:p>
-            <a:fld id="{613F318F-0286-42A3-B4C5-AF963E0EF8C7}" type="datetimeFigureOut">
+            <a:fld id="{3C74B534-BFFE-470C-9B0C-27419DE961B1}" type="datetimeFigureOut">
               <a:rPr kumimoji="1" lang="ja-JP" altLang="en-US" smtClean="0"/>
               <a:t>2026/7/30</a:t>
             </a:fld>
@@ -2935,7 +2935,7 @@
           <p:cNvPr id="6" name="フッター プレースホルダー 5">
             <a:extLst>
               <a:ext uri="{FF2B5EF4-FFF2-40B4-BE49-F238E27FC236}">
-                <a16:creationId xmlns:a16="http://schemas.microsoft.com/office/drawing/2014/main" id="{EECD4FFC-6DC2-DA5F-EEDF-A05601BD1F83}"/>
+                <a16:creationId xmlns:a16="http://schemas.microsoft.com/office/drawing/2014/main" id="{FF60B46E-6157-6D40-6483-F07A918A4C62}"/>
               </a:ext>
             </a:extLst>
           </p:cNvPr>
@@ -2960,7 +2960,7 @@
           <p:cNvPr id="7" name="スライド番号プレースホルダー 6">
             <a:extLst>
               <a:ext uri="{FF2B5EF4-FFF2-40B4-BE49-F238E27FC236}">
-                <a16:creationId xmlns:a16="http://schemas.microsoft.com/office/drawing/2014/main" id="{E9E5DB2A-6033-76B8-A6FE-38D29AE2E541}"/>
+                <a16:creationId xmlns:a16="http://schemas.microsoft.com/office/drawing/2014/main" id="{DEF3F30D-3498-2559-3715-572BF57BCA63}"/>
               </a:ext>
             </a:extLst>
           </p:cNvPr>
@@ -2976,7 +2976,7 @@
           <a:bodyPr/>
           <a:lstStyle/>
           <a:p>
-            <a:fld id="{CF235A59-D3CA-4A18-84D9-4CB90E6C5DC8}" type="slidenum">
+            <a:fld id="{94DB0818-224C-4B82-94AC-1BF6F60DC6CA}" type="slidenum">
               <a:rPr kumimoji="1" lang="ja-JP" altLang="en-US" smtClean="0"/>
               <a:t>‹#›</a:t>
             </a:fld>
@@ -2987,7 +2987,7 @@
     </p:spTree>
     <p:extLst>
       <p:ext uri="{BB962C8B-B14F-4D97-AF65-F5344CB8AC3E}">
-        <p14:creationId xmlns:p14="http://schemas.microsoft.com/office/powerpoint/2010/main" val="618223393"/>
+        <p14:creationId xmlns:p14="http://schemas.microsoft.com/office/powerpoint/2010/main" val="2958330527"/>
       </p:ext>
     </p:extLst>
   </p:cSld>
@@ -3024,7 +3024,7 @@
           <p:cNvPr id="2" name="タイトル プレースホルダー 1">
             <a:extLst>
               <a:ext uri="{FF2B5EF4-FFF2-40B4-BE49-F238E27FC236}">
-                <a16:creationId xmlns:a16="http://schemas.microsoft.com/office/drawing/2014/main" id="{7A385B94-1322-2E2A-E892-324E48ED5BA9}"/>
+                <a16:creationId xmlns:a16="http://schemas.microsoft.com/office/drawing/2014/main" id="{1847FC45-6745-2ACD-396C-F90AFE5F3759}"/>
               </a:ext>
             </a:extLst>
           </p:cNvPr>
@@ -3062,7 +3062,7 @@
           <p:cNvPr id="3" name="テキスト プレースホルダー 2">
             <a:extLst>
               <a:ext uri="{FF2B5EF4-FFF2-40B4-BE49-F238E27FC236}">
-                <a16:creationId xmlns:a16="http://schemas.microsoft.com/office/drawing/2014/main" id="{60FAEADF-48A8-AFFA-7078-3B1CB4F0E0BC}"/>
+                <a16:creationId xmlns:a16="http://schemas.microsoft.com/office/drawing/2014/main" id="{65C6E850-2D66-263E-1C93-5354A281CDE4}"/>
               </a:ext>
             </a:extLst>
           </p:cNvPr>
@@ -3161,7 +3161,7 @@
           <p:cNvPr id="4" name="日付プレースホルダー 3">
             <a:extLst>
               <a:ext uri="{FF2B5EF4-FFF2-40B4-BE49-F238E27FC236}">
-                <a16:creationId xmlns:a16="http://schemas.microsoft.com/office/drawing/2014/main" id="{615134CC-34BF-6F0E-AB7C-486E691188FF}"/>
+                <a16:creationId xmlns:a16="http://schemas.microsoft.com/office/drawing/2014/main" id="{BBC164F0-0D6B-D8CE-2159-9AFE486481D7}"/>
               </a:ext>
             </a:extLst>
           </p:cNvPr>
@@ -3195,7 +3195,7 @@
             </a:lvl1pPr>
           </a:lstStyle>
           <a:p>
-            <a:fld id="{613F318F-0286-42A3-B4C5-AF963E0EF8C7}" type="datetimeFigureOut">
+            <a:fld id="{3C74B534-BFFE-470C-9B0C-27419DE961B1}" type="datetimeFigureOut">
               <a:rPr kumimoji="1" lang="ja-JP" altLang="en-US" smtClean="0"/>
               <a:t>2026/7/30</a:t>
             </a:fld>
@@ -3208,7 +3208,7 @@
           <p:cNvPr id="5" name="フッター プレースホルダー 4">
             <a:extLst>
               <a:ext uri="{FF2B5EF4-FFF2-40B4-BE49-F238E27FC236}">
-                <a16:creationId xmlns:a16="http://schemas.microsoft.com/office/drawing/2014/main" id="{5BF79DD2-17D0-68F3-98AD-5254E5C0D87E}"/>
+                <a16:creationId xmlns:a16="http://schemas.microsoft.com/office/drawing/2014/main" id="{A5ADED4A-044D-4DB5-CAA7-273FD180710E}"/>
               </a:ext>
             </a:extLst>
           </p:cNvPr>
@@ -3251,7 +3251,7 @@
           <p:cNvPr id="6" name="スライド番号プレースホルダー 5">
             <a:extLst>
               <a:ext uri="{FF2B5EF4-FFF2-40B4-BE49-F238E27FC236}">
-                <a16:creationId xmlns:a16="http://schemas.microsoft.com/office/drawing/2014/main" id="{78407532-384E-A6CC-537B-0AA2BEA48EB9}"/>
+                <a16:creationId xmlns:a16="http://schemas.microsoft.com/office/drawing/2014/main" id="{90BF2213-7EFC-3CF4-5B63-EF1CCF0521C7}"/>
               </a:ext>
             </a:extLst>
           </p:cNvPr>
@@ -3285,7 +3285,7 @@
             </a:lvl1pPr>
           </a:lstStyle>
           <a:p>
-            <a:fld id="{CF235A59-D3CA-4A18-84D9-4CB90E6C5DC8}" type="slidenum">
+            <a:fld id="{94DB0818-224C-4B82-94AC-1BF6F60DC6CA}" type="slidenum">
               <a:rPr kumimoji="1" lang="ja-JP" altLang="en-US" smtClean="0"/>
               <a:t>‹#›</a:t>
             </a:fld>
@@ -3296,7 +3296,7 @@
     </p:spTree>
     <p:extLst>
       <p:ext uri="{BB962C8B-B14F-4D97-AF65-F5344CB8AC3E}">
-        <p14:creationId xmlns:p14="http://schemas.microsoft.com/office/powerpoint/2010/main" val="3183955849"/>
+        <p14:creationId xmlns:p14="http://schemas.microsoft.com/office/powerpoint/2010/main" val="131139108"/>
       </p:ext>
     </p:extLst>
   </p:cSld>
@@ -3619,7 +3619,7 @@
           <p:cNvPr id="2" name="テキスト ボックス 1">
             <a:extLst>
               <a:ext uri="{FF2B5EF4-FFF2-40B4-BE49-F238E27FC236}">
-                <a16:creationId xmlns:a16="http://schemas.microsoft.com/office/drawing/2014/main" id="{BB224A56-C1DE-68BD-FA15-14BA55CC0695}"/>
+                <a16:creationId xmlns:a16="http://schemas.microsoft.com/office/drawing/2014/main" id="{1DBD3F90-C3A4-2039-2B74-4D3B7221E57A}"/>
               </a:ext>
             </a:extLst>
           </p:cNvPr>
@@ -3665,7 +3665,7 @@
           <p:cNvPr id="3" name="テキスト ボックス 2">
             <a:extLst>
               <a:ext uri="{FF2B5EF4-FFF2-40B4-BE49-F238E27FC236}">
-                <a16:creationId xmlns:a16="http://schemas.microsoft.com/office/drawing/2014/main" id="{E795A6CC-FB85-A510-A24D-2E88C8B23C60}"/>
+                <a16:creationId xmlns:a16="http://schemas.microsoft.com/office/drawing/2014/main" id="{9DFC46E8-E828-869C-6F24-233D60B29E5D}"/>
               </a:ext>
             </a:extLst>
           </p:cNvPr>
@@ -3714,7 +3714,7 @@
           <p:cNvPr id="4" name="テキスト ボックス 3">
             <a:extLst>
               <a:ext uri="{FF2B5EF4-FFF2-40B4-BE49-F238E27FC236}">
-                <a16:creationId xmlns:a16="http://schemas.microsoft.com/office/drawing/2014/main" id="{624FF47B-563A-61F8-357E-AB1226299278}"/>
+                <a16:creationId xmlns:a16="http://schemas.microsoft.com/office/drawing/2014/main" id="{5928FDAF-F31E-DFD5-CB43-707805DAB1B3}"/>
               </a:ext>
             </a:extLst>
           </p:cNvPr>
@@ -3754,7 +3754,7 @@
           <p:cNvPr id="5" name="テキスト ボックス 4">
             <a:extLst>
               <a:ext uri="{FF2B5EF4-FFF2-40B4-BE49-F238E27FC236}">
-                <a16:creationId xmlns:a16="http://schemas.microsoft.com/office/drawing/2014/main" id="{2E335708-4721-0EC6-187F-739EA8722A93}"/>
+                <a16:creationId xmlns:a16="http://schemas.microsoft.com/office/drawing/2014/main" id="{D245D1D8-E117-AE10-B70F-4EBE5DFE4327}"/>
               </a:ext>
             </a:extLst>
           </p:cNvPr>
@@ -3801,7 +3801,7 @@
             <a:hlinkClick r:id="" action="ppaction://media"/>
             <a:extLst>
               <a:ext uri="{FF2B5EF4-FFF2-40B4-BE49-F238E27FC236}">
-                <a16:creationId xmlns:a16="http://schemas.microsoft.com/office/drawing/2014/main" id="{D8CE46DF-8E7A-7C27-52D3-B777336368BB}"/>
+                <a16:creationId xmlns:a16="http://schemas.microsoft.com/office/drawing/2014/main" id="{4B540949-2E58-605E-3326-B0515A834B50}"/>
               </a:ext>
             </a:extLst>
           </p:cNvPr>
@@ -3836,7 +3836,7 @@
     </p:spTree>
     <p:extLst>
       <p:ext uri="{BB962C8B-B14F-4D97-AF65-F5344CB8AC3E}">
-        <p14:creationId xmlns:p14="http://schemas.microsoft.com/office/powerpoint/2010/main" val="2548405706"/>
+        <p14:creationId xmlns:p14="http://schemas.microsoft.com/office/powerpoint/2010/main" val="3253655600"/>
       </p:ext>
     </p:extLst>
   </p:cSld>
@@ -3960,7 +3960,7 @@
           <p:cNvPr id="2" name="テキスト ボックス 1">
             <a:extLst>
               <a:ext uri="{FF2B5EF4-FFF2-40B4-BE49-F238E27FC236}">
-                <a16:creationId xmlns:a16="http://schemas.microsoft.com/office/drawing/2014/main" id="{867CE4E5-1F88-9355-F6A5-137173C5945A}"/>
+                <a16:creationId xmlns:a16="http://schemas.microsoft.com/office/drawing/2014/main" id="{12DFEFE0-E549-9710-5F8C-0DA009C90FD7}"/>
               </a:ext>
             </a:extLst>
           </p:cNvPr>
@@ -4006,7 +4006,7 @@
           <p:cNvPr id="3" name="テキスト ボックス 2">
             <a:extLst>
               <a:ext uri="{FF2B5EF4-FFF2-40B4-BE49-F238E27FC236}">
-                <a16:creationId xmlns:a16="http://schemas.microsoft.com/office/drawing/2014/main" id="{34BE9F6A-1D52-1498-49DF-920DD92D301E}"/>
+                <a16:creationId xmlns:a16="http://schemas.microsoft.com/office/drawing/2014/main" id="{B7E956D6-07F1-D295-5AD6-D66D7C914D5F}"/>
               </a:ext>
             </a:extLst>
           </p:cNvPr>
@@ -4046,7 +4046,7 @@
           <p:cNvPr id="4" name="テキスト ボックス 3">
             <a:extLst>
               <a:ext uri="{FF2B5EF4-FFF2-40B4-BE49-F238E27FC236}">
-                <a16:creationId xmlns:a16="http://schemas.microsoft.com/office/drawing/2014/main" id="{1049EDFB-52E4-1D2E-DA7D-93B6542BA1CC}"/>
+                <a16:creationId xmlns:a16="http://schemas.microsoft.com/office/drawing/2014/main" id="{5BFFAE17-3EC8-1854-B70C-9D4C1A06BA91}"/>
               </a:ext>
             </a:extLst>
           </p:cNvPr>
@@ -4113,7 +4113,7 @@
           <p:cNvPr id="5" name="テキスト ボックス 4">
             <a:extLst>
               <a:ext uri="{FF2B5EF4-FFF2-40B4-BE49-F238E27FC236}">
-                <a16:creationId xmlns:a16="http://schemas.microsoft.com/office/drawing/2014/main" id="{31D4B51E-B3BA-3FB9-6522-3DFC02BF9C77}"/>
+                <a16:creationId xmlns:a16="http://schemas.microsoft.com/office/drawing/2014/main" id="{AA9171A7-8F56-C919-A7FE-47B4E14403FE}"/>
               </a:ext>
             </a:extLst>
           </p:cNvPr>
@@ -4160,7 +4160,7 @@
             <a:hlinkClick r:id="" action="ppaction://media"/>
             <a:extLst>
               <a:ext uri="{FF2B5EF4-FFF2-40B4-BE49-F238E27FC236}">
-                <a16:creationId xmlns:a16="http://schemas.microsoft.com/office/drawing/2014/main" id="{3A370FA2-CB90-474B-5375-D8F944C7CFCE}"/>
+                <a16:creationId xmlns:a16="http://schemas.microsoft.com/office/drawing/2014/main" id="{0E5B21D1-3BEA-1405-E9D6-24F3BE2FC47C}"/>
               </a:ext>
             </a:extLst>
           </p:cNvPr>
@@ -4195,7 +4195,7 @@
     </p:spTree>
     <p:extLst>
       <p:ext uri="{BB962C8B-B14F-4D97-AF65-F5344CB8AC3E}">
-        <p14:creationId xmlns:p14="http://schemas.microsoft.com/office/powerpoint/2010/main" val="4068413404"/>
+        <p14:creationId xmlns:p14="http://schemas.microsoft.com/office/powerpoint/2010/main" val="832623892"/>
       </p:ext>
     </p:extLst>
   </p:cSld>
@@ -4319,7 +4319,7 @@
           <p:cNvPr id="2" name="テキスト ボックス 1">
             <a:extLst>
               <a:ext uri="{FF2B5EF4-FFF2-40B4-BE49-F238E27FC236}">
-                <a16:creationId xmlns:a16="http://schemas.microsoft.com/office/drawing/2014/main" id="{08328A0C-EA15-5CD3-B7F2-6669EF559EE7}"/>
+                <a16:creationId xmlns:a16="http://schemas.microsoft.com/office/drawing/2014/main" id="{1F6071BF-2286-A6C9-B1E3-295BBF282F44}"/>
               </a:ext>
             </a:extLst>
           </p:cNvPr>
@@ -4365,7 +4365,7 @@
           <p:cNvPr id="3" name="テキスト ボックス 2">
             <a:extLst>
               <a:ext uri="{FF2B5EF4-FFF2-40B4-BE49-F238E27FC236}">
-                <a16:creationId xmlns:a16="http://schemas.microsoft.com/office/drawing/2014/main" id="{EC8DC2D8-B8AE-E44E-DC09-7BE733167290}"/>
+                <a16:creationId xmlns:a16="http://schemas.microsoft.com/office/drawing/2014/main" id="{210CC7D4-262E-6E87-8E11-C316FD5A5377}"/>
               </a:ext>
             </a:extLst>
           </p:cNvPr>
@@ -4405,7 +4405,7 @@
           <p:cNvPr id="4" name="テキスト ボックス 3">
             <a:extLst>
               <a:ext uri="{FF2B5EF4-FFF2-40B4-BE49-F238E27FC236}">
-                <a16:creationId xmlns:a16="http://schemas.microsoft.com/office/drawing/2014/main" id="{0569AE7A-C727-B412-01CD-D8C05882B6E5}"/>
+                <a16:creationId xmlns:a16="http://schemas.microsoft.com/office/drawing/2014/main" id="{84AE4056-602C-B14C-D52B-8F799F915A00}"/>
               </a:ext>
             </a:extLst>
           </p:cNvPr>
@@ -4482,7 +4482,7 @@
           <p:cNvPr id="5" name="テキスト ボックス 4">
             <a:extLst>
               <a:ext uri="{FF2B5EF4-FFF2-40B4-BE49-F238E27FC236}">
-                <a16:creationId xmlns:a16="http://schemas.microsoft.com/office/drawing/2014/main" id="{26DA9E16-70D4-DA0D-83B7-CF02F7C9B042}"/>
+                <a16:creationId xmlns:a16="http://schemas.microsoft.com/office/drawing/2014/main" id="{2FF25479-97BF-3817-7633-DBA9FFD907DB}"/>
               </a:ext>
             </a:extLst>
           </p:cNvPr>
@@ -4529,7 +4529,7 @@
             <a:hlinkClick r:id="" action="ppaction://media"/>
             <a:extLst>
               <a:ext uri="{FF2B5EF4-FFF2-40B4-BE49-F238E27FC236}">
-                <a16:creationId xmlns:a16="http://schemas.microsoft.com/office/drawing/2014/main" id="{0343DC90-1FC6-4FC6-34FE-7CFEB32DDF13}"/>
+                <a16:creationId xmlns:a16="http://schemas.microsoft.com/office/drawing/2014/main" id="{456C9708-FA1D-80FF-AC2C-7C4EC29D7ACD}"/>
               </a:ext>
             </a:extLst>
           </p:cNvPr>
@@ -4564,7 +4564,7 @@
     </p:spTree>
     <p:extLst>
       <p:ext uri="{BB962C8B-B14F-4D97-AF65-F5344CB8AC3E}">
-        <p14:creationId xmlns:p14="http://schemas.microsoft.com/office/powerpoint/2010/main" val="127915964"/>
+        <p14:creationId xmlns:p14="http://schemas.microsoft.com/office/powerpoint/2010/main" val="165487029"/>
       </p:ext>
     </p:extLst>
   </p:cSld>
@@ -4688,7 +4688,7 @@
           <p:cNvPr id="2" name="テキスト ボックス 1">
             <a:extLst>
               <a:ext uri="{FF2B5EF4-FFF2-40B4-BE49-F238E27FC236}">
-                <a16:creationId xmlns:a16="http://schemas.microsoft.com/office/drawing/2014/main" id="{52123447-4BAE-586C-2764-2B90A5F00D1B}"/>
+                <a16:creationId xmlns:a16="http://schemas.microsoft.com/office/drawing/2014/main" id="{249B9930-0DFA-0566-3F50-7E122620622B}"/>
               </a:ext>
             </a:extLst>
           </p:cNvPr>
@@ -4734,7 +4734,7 @@
           <p:cNvPr id="3" name="テキスト ボックス 2">
             <a:extLst>
               <a:ext uri="{FF2B5EF4-FFF2-40B4-BE49-F238E27FC236}">
-                <a16:creationId xmlns:a16="http://schemas.microsoft.com/office/drawing/2014/main" id="{2B1BCAB6-A622-43BC-1D30-5CC0330C62D1}"/>
+                <a16:creationId xmlns:a16="http://schemas.microsoft.com/office/drawing/2014/main" id="{72D557AD-95E4-9182-27FF-2C12036B58C8}"/>
               </a:ext>
             </a:extLst>
           </p:cNvPr>
@@ -4774,7 +4774,7 @@
           <p:cNvPr id="4" name="テキスト ボックス 3">
             <a:extLst>
               <a:ext uri="{FF2B5EF4-FFF2-40B4-BE49-F238E27FC236}">
-                <a16:creationId xmlns:a16="http://schemas.microsoft.com/office/drawing/2014/main" id="{3EB99C78-2A4B-5762-D824-C7A5ACA2AA53}"/>
+                <a16:creationId xmlns:a16="http://schemas.microsoft.com/office/drawing/2014/main" id="{17974431-F3B9-7D2B-3868-25D461D95418}"/>
               </a:ext>
             </a:extLst>
           </p:cNvPr>
@@ -4884,7 +4884,7 @@
           <p:cNvPr id="5" name="テキスト ボックス 4">
             <a:extLst>
               <a:ext uri="{FF2B5EF4-FFF2-40B4-BE49-F238E27FC236}">
-                <a16:creationId xmlns:a16="http://schemas.microsoft.com/office/drawing/2014/main" id="{7792B269-FCEB-38BE-B869-8E362E8DDAFC}"/>
+                <a16:creationId xmlns:a16="http://schemas.microsoft.com/office/drawing/2014/main" id="{B028A375-43CF-8913-1C5B-469096A41CCE}"/>
               </a:ext>
             </a:extLst>
           </p:cNvPr>
@@ -4931,7 +4931,7 @@
             <a:hlinkClick r:id="" action="ppaction://media"/>
             <a:extLst>
               <a:ext uri="{FF2B5EF4-FFF2-40B4-BE49-F238E27FC236}">
-                <a16:creationId xmlns:a16="http://schemas.microsoft.com/office/drawing/2014/main" id="{A3D58EB4-5DBF-96D7-944A-C900EE2709AC}"/>
+                <a16:creationId xmlns:a16="http://schemas.microsoft.com/office/drawing/2014/main" id="{F53E89FD-9551-4584-D47B-AD8EDCCAC72F}"/>
               </a:ext>
             </a:extLst>
           </p:cNvPr>
@@ -4966,7 +4966,7 @@
     </p:spTree>
     <p:extLst>
       <p:ext uri="{BB962C8B-B14F-4D97-AF65-F5344CB8AC3E}">
-        <p14:creationId xmlns:p14="http://schemas.microsoft.com/office/powerpoint/2010/main" val="2905787003"/>
+        <p14:creationId xmlns:p14="http://schemas.microsoft.com/office/powerpoint/2010/main" val="167522782"/>
       </p:ext>
     </p:extLst>
   </p:cSld>
@@ -5090,7 +5090,7 @@
           <p:cNvPr id="2" name="テキスト ボックス 1">
             <a:extLst>
               <a:ext uri="{FF2B5EF4-FFF2-40B4-BE49-F238E27FC236}">
-                <a16:creationId xmlns:a16="http://schemas.microsoft.com/office/drawing/2014/main" id="{78DD1AA4-F2BE-BABC-172A-F05D38D5234A}"/>
+                <a16:creationId xmlns:a16="http://schemas.microsoft.com/office/drawing/2014/main" id="{5AF5400C-0FC7-1899-943E-88B43D849FE4}"/>
               </a:ext>
             </a:extLst>
           </p:cNvPr>
@@ -5136,7 +5136,7 @@
           <p:cNvPr id="3" name="テキスト ボックス 2">
             <a:extLst>
               <a:ext uri="{FF2B5EF4-FFF2-40B4-BE49-F238E27FC236}">
-                <a16:creationId xmlns:a16="http://schemas.microsoft.com/office/drawing/2014/main" id="{416CC686-04E0-5A3E-FFDC-5202185C336C}"/>
+                <a16:creationId xmlns:a16="http://schemas.microsoft.com/office/drawing/2014/main" id="{D1D4FA67-3774-CF7D-E3AB-F68ACA5C2573}"/>
               </a:ext>
             </a:extLst>
           </p:cNvPr>
@@ -5176,7 +5176,7 @@
           <p:cNvPr id="4" name="テキスト ボックス 3">
             <a:extLst>
               <a:ext uri="{FF2B5EF4-FFF2-40B4-BE49-F238E27FC236}">
-                <a16:creationId xmlns:a16="http://schemas.microsoft.com/office/drawing/2014/main" id="{4CDB5E17-482C-7C83-2319-803B97391DA9}"/>
+                <a16:creationId xmlns:a16="http://schemas.microsoft.com/office/drawing/2014/main" id="{5001C1A1-D866-0A73-9C33-74B1789989F9}"/>
               </a:ext>
             </a:extLst>
           </p:cNvPr>
@@ -5200,20 +5200,14 @@
           <a:lstStyle/>
           <a:p>
             <a:r>
-              <a:rPr kumimoji="1" lang="en-US" altLang="ja-JP" sz="2000">
+              <a:rPr kumimoji="1" lang="ja-JP" altLang="en-US" sz="2000">
                 <a:solidFill>
                   <a:srgbClr val="333333"/>
                 </a:solidFill>
                 <a:latin typeface="Arial" panose="020B0604020202020204" pitchFamily="34" charset="0"/>
               </a:rPr>
-              <a:t>Route admin domain to management console</a:t>
-            </a:r>
-            <a:endParaRPr kumimoji="1" lang="ja-JP" altLang="en-US" sz="2000">
-              <a:solidFill>
-                <a:srgbClr val="333333"/>
-              </a:solidFill>
-              <a:latin typeface="Arial" panose="020B0604020202020204" pitchFamily="34" charset="0"/>
-            </a:endParaRPr>
+              <a:t>直近のコミットでは、実装の見直しと継続的な改善が行われました。</a:t>
+            </a:r>
           </a:p>
         </p:txBody>
       </p:sp>
@@ -5222,7 +5216,7 @@
           <p:cNvPr id="5" name="テキスト ボックス 4">
             <a:extLst>
               <a:ext uri="{FF2B5EF4-FFF2-40B4-BE49-F238E27FC236}">
-                <a16:creationId xmlns:a16="http://schemas.microsoft.com/office/drawing/2014/main" id="{F3AE2430-76E7-4D82-006A-B7296B523306}"/>
+                <a16:creationId xmlns:a16="http://schemas.microsoft.com/office/drawing/2014/main" id="{F31D7543-9BBB-9BC7-5372-9F1709929A12}"/>
               </a:ext>
             </a:extLst>
           </p:cNvPr>
@@ -5269,7 +5263,7 @@
             <a:hlinkClick r:id="" action="ppaction://media"/>
             <a:extLst>
               <a:ext uri="{FF2B5EF4-FFF2-40B4-BE49-F238E27FC236}">
-                <a16:creationId xmlns:a16="http://schemas.microsoft.com/office/drawing/2014/main" id="{E97D094E-14B8-0597-43F0-BE16F70FB18C}"/>
+                <a16:creationId xmlns:a16="http://schemas.microsoft.com/office/drawing/2014/main" id="{F57D54F2-444A-23F0-6F26-C66389262B72}"/>
               </a:ext>
             </a:extLst>
           </p:cNvPr>
@@ -5304,7 +5298,7 @@
     </p:spTree>
     <p:extLst>
       <p:ext uri="{BB962C8B-B14F-4D97-AF65-F5344CB8AC3E}">
-        <p14:creationId xmlns:p14="http://schemas.microsoft.com/office/powerpoint/2010/main" val="1788195273"/>
+        <p14:creationId xmlns:p14="http://schemas.microsoft.com/office/powerpoint/2010/main" val="4103944006"/>
       </p:ext>
     </p:extLst>
   </p:cSld>
@@ -5313,10 +5307,10 @@
   </p:clrMapOvr>
   <mc:AlternateContent xmlns:mc="http://schemas.openxmlformats.org/markup-compatibility/2006">
     <mc:Choice xmlns:p14="http://schemas.microsoft.com/office/powerpoint/2010/main" Requires="p14">
-      <p:transition spd="slow" p14:dur="2000" advTm="8000"/>
+      <p:transition spd="slow" p14:dur="2000" advTm="7000"/>
     </mc:Choice>
     <mc:Fallback>
-      <p:transition spd="slow" advTm="8000"/>
+      <p:transition spd="slow" advTm="7000"/>
     </mc:Fallback>
   </mc:AlternateContent>
   <p:timing>
@@ -5347,7 +5341,7 @@
                                   <p:childTnLst>
                                     <p:cmd type="call" cmd="playFrom(0.0)">
                                       <p:cBhvr>
-                                        <p:cTn id="6" dur="7156" fill="hold"/>
+                                        <p:cTn id="6" dur="6076" fill="hold"/>
                                         <p:tgtEl>
                                           <p:spTgt spid="6"/>
                                         </p:tgtEl>
@@ -5428,7 +5422,7 @@
           <p:cNvPr id="2" name="テキスト ボックス 1">
             <a:extLst>
               <a:ext uri="{FF2B5EF4-FFF2-40B4-BE49-F238E27FC236}">
-                <a16:creationId xmlns:a16="http://schemas.microsoft.com/office/drawing/2014/main" id="{B91030A0-426A-8D49-9D67-BE724734C7D3}"/>
+                <a16:creationId xmlns:a16="http://schemas.microsoft.com/office/drawing/2014/main" id="{F0FAA122-4ED4-3A77-7494-ABBE0FB356F8}"/>
               </a:ext>
             </a:extLst>
           </p:cNvPr>
@@ -5474,7 +5468,7 @@
           <p:cNvPr id="3" name="テキスト ボックス 2">
             <a:extLst>
               <a:ext uri="{FF2B5EF4-FFF2-40B4-BE49-F238E27FC236}">
-                <a16:creationId xmlns:a16="http://schemas.microsoft.com/office/drawing/2014/main" id="{46B1C0CB-BFE2-6955-157B-F47074DD1A8D}"/>
+                <a16:creationId xmlns:a16="http://schemas.microsoft.com/office/drawing/2014/main" id="{5C5AC6B6-F036-E91C-B877-3BA98C70DFB5}"/>
               </a:ext>
             </a:extLst>
           </p:cNvPr>
@@ -5514,7 +5508,7 @@
           <p:cNvPr id="4" name="テキスト ボックス 3">
             <a:extLst>
               <a:ext uri="{FF2B5EF4-FFF2-40B4-BE49-F238E27FC236}">
-                <a16:creationId xmlns:a16="http://schemas.microsoft.com/office/drawing/2014/main" id="{C8C597D8-691A-9C93-06B5-F977E145758A}"/>
+                <a16:creationId xmlns:a16="http://schemas.microsoft.com/office/drawing/2014/main" id="{821DD194-0C15-800D-020A-BA67EC48F102}"/>
               </a:ext>
             </a:extLst>
           </p:cNvPr>
@@ -5579,7 +5573,7 @@
           <p:cNvPr id="5" name="テキスト ボックス 4">
             <a:extLst>
               <a:ext uri="{FF2B5EF4-FFF2-40B4-BE49-F238E27FC236}">
-                <a16:creationId xmlns:a16="http://schemas.microsoft.com/office/drawing/2014/main" id="{5993B091-57A9-1F97-F1FA-83807FF5DB4D}"/>
+                <a16:creationId xmlns:a16="http://schemas.microsoft.com/office/drawing/2014/main" id="{E30C80FB-E2EE-D0E5-F885-7426F5B2EC39}"/>
               </a:ext>
             </a:extLst>
           </p:cNvPr>
@@ -5626,7 +5620,7 @@
             <a:hlinkClick r:id="" action="ppaction://media"/>
             <a:extLst>
               <a:ext uri="{FF2B5EF4-FFF2-40B4-BE49-F238E27FC236}">
-                <a16:creationId xmlns:a16="http://schemas.microsoft.com/office/drawing/2014/main" id="{B94ACE8E-AC20-453E-6F94-0B18C25B1B08}"/>
+                <a16:creationId xmlns:a16="http://schemas.microsoft.com/office/drawing/2014/main" id="{D38695C5-5F3B-800B-7F7A-9A32E5811D72}"/>
               </a:ext>
             </a:extLst>
           </p:cNvPr>
@@ -5661,7 +5655,7 @@
     </p:spTree>
     <p:extLst>
       <p:ext uri="{BB962C8B-B14F-4D97-AF65-F5344CB8AC3E}">
-        <p14:creationId xmlns:p14="http://schemas.microsoft.com/office/powerpoint/2010/main" val="2402723378"/>
+        <p14:creationId xmlns:p14="http://schemas.microsoft.com/office/powerpoint/2010/main" val="2399827178"/>
       </p:ext>
     </p:extLst>
   </p:cSld>
